--- a/scientific_emotion_recognition_design.pptx
+++ b/scientific_emotion_recognition_design.pptx
@@ -24,6 +24,7 @@
     <p:sldId id="269" r:id="rId19"/>
     <p:sldId id="270" r:id="rId20"/>
     <p:sldId id="271" r:id="rId21"/>
+    <p:sldId id="272" r:id="rId22"/>
   </p:sldIdLst>
   <p:sldSz cy="6858000" cx="9144000"/>
   <p:notesSz cx="6858000" cy="9144000"/>
@@ -958,7 +959,7 @@
   <p:cSld>
     <p:spTree>
       <p:nvGrpSpPr>
-        <p:cNvPr id="161" name="Shape 161"/>
+        <p:cNvPr id="162" name="Shape 162"/>
         <p:cNvGrpSpPr/>
         <p:nvPr/>
       </p:nvGrpSpPr>
@@ -972,7 +973,7 @@
       </p:grpSpPr>
       <p:sp>
         <p:nvSpPr>
-          <p:cNvPr id="162" name="Google Shape;162;g3e2b96a3b5e_0_94:notes"/>
+          <p:cNvPr id="163" name="Google Shape;163;g3e2b96a3b5e_0_75:notes"/>
           <p:cNvSpPr txBox="1"/>
           <p:nvPr>
             <p:ph idx="1" type="body"/>
@@ -1019,7 +1020,7 @@
       </p:sp>
       <p:sp>
         <p:nvSpPr>
-          <p:cNvPr id="163" name="Google Shape;163;g3e2b96a3b5e_0_94:notes"/>
+          <p:cNvPr id="164" name="Google Shape;164;g3e2b96a3b5e_0_75:notes"/>
           <p:cNvSpPr/>
           <p:nvPr>
             <p:ph idx="2" type="sldImg"/>
@@ -1089,7 +1090,7 @@
       </p:grpSpPr>
       <p:sp>
         <p:nvSpPr>
-          <p:cNvPr id="172" name="Google Shape;172;g3e2b96a3b5e_0_103:notes"/>
+          <p:cNvPr id="172" name="Google Shape;172;g3e2b96a3b5e_0_94:notes"/>
           <p:cNvSpPr txBox="1"/>
           <p:nvPr>
             <p:ph idx="1" type="body"/>
@@ -1136,7 +1137,7 @@
       </p:sp>
       <p:sp>
         <p:nvSpPr>
-          <p:cNvPr id="173" name="Google Shape;173;g3e2b96a3b5e_0_103:notes"/>
+          <p:cNvPr id="173" name="Google Shape;173;g3e2b96a3b5e_0_94:notes"/>
           <p:cNvSpPr/>
           <p:nvPr>
             <p:ph idx="2" type="sldImg"/>
@@ -1206,7 +1207,7 @@
       </p:grpSpPr>
       <p:sp>
         <p:nvSpPr>
-          <p:cNvPr id="182" name="Google Shape;182;g3e2b96a3b5e_0_84:notes"/>
+          <p:cNvPr id="182" name="Google Shape;182;g3e2b96a3b5e_0_103:notes"/>
           <p:cNvSpPr txBox="1"/>
           <p:nvPr>
             <p:ph idx="1" type="body"/>
@@ -1253,7 +1254,7 @@
       </p:sp>
       <p:sp>
         <p:nvSpPr>
-          <p:cNvPr id="183" name="Google Shape;183;g3e2b96a3b5e_0_84:notes"/>
+          <p:cNvPr id="183" name="Google Shape;183;g3e2b96a3b5e_0_103:notes"/>
           <p:cNvSpPr/>
           <p:nvPr>
             <p:ph idx="2" type="sldImg"/>
@@ -1309,7 +1310,7 @@
   <p:cSld>
     <p:spTree>
       <p:nvGrpSpPr>
-        <p:cNvPr id="190" name="Shape 190"/>
+        <p:cNvPr id="191" name="Shape 191"/>
         <p:cNvGrpSpPr/>
         <p:nvPr/>
       </p:nvGrpSpPr>
@@ -1323,7 +1324,7 @@
       </p:grpSpPr>
       <p:sp>
         <p:nvSpPr>
-          <p:cNvPr id="191" name="Google Shape;191;g3e2b96a3b5e_0_113:notes"/>
+          <p:cNvPr id="192" name="Google Shape;192;g3e2b96a3b5e_0_84:notes"/>
           <p:cNvSpPr txBox="1"/>
           <p:nvPr>
             <p:ph idx="1" type="body"/>
@@ -1370,7 +1371,7 @@
       </p:sp>
       <p:sp>
         <p:nvSpPr>
-          <p:cNvPr id="192" name="Google Shape;192;g3e2b96a3b5e_0_113:notes"/>
+          <p:cNvPr id="193" name="Google Shape;193;g3e2b96a3b5e_0_84:notes"/>
           <p:cNvSpPr/>
           <p:nvPr>
             <p:ph idx="2" type="sldImg"/>
@@ -1426,7 +1427,7 @@
   <p:cSld>
     <p:spTree>
       <p:nvGrpSpPr>
-        <p:cNvPr id="199" name="Shape 199"/>
+        <p:cNvPr id="200" name="Shape 200"/>
         <p:cNvGrpSpPr/>
         <p:nvPr/>
       </p:nvGrpSpPr>
@@ -1440,7 +1441,7 @@
       </p:grpSpPr>
       <p:sp>
         <p:nvSpPr>
-          <p:cNvPr id="200" name="Google Shape;200;g3e2b96a3b5e_0_123:notes"/>
+          <p:cNvPr id="201" name="Google Shape;201;g3e2b96a3b5e_0_113:notes"/>
           <p:cNvSpPr txBox="1"/>
           <p:nvPr>
             <p:ph idx="1" type="body"/>
@@ -1487,7 +1488,7 @@
       </p:sp>
       <p:sp>
         <p:nvSpPr>
-          <p:cNvPr id="201" name="Google Shape;201;g3e2b96a3b5e_0_123:notes"/>
+          <p:cNvPr id="202" name="Google Shape;202;g3e2b96a3b5e_0_113:notes"/>
           <p:cNvSpPr/>
           <p:nvPr>
             <p:ph idx="2" type="sldImg"/>
@@ -1543,7 +1544,7 @@
   <p:cSld>
     <p:spTree>
       <p:nvGrpSpPr>
-        <p:cNvPr id="208" name="Shape 208"/>
+        <p:cNvPr id="209" name="Shape 209"/>
         <p:cNvGrpSpPr/>
         <p:nvPr/>
       </p:nvGrpSpPr>
@@ -1557,7 +1558,7 @@
       </p:grpSpPr>
       <p:sp>
         <p:nvSpPr>
-          <p:cNvPr id="209" name="Google Shape;209;g3e2b96a3b5e_0_133:notes"/>
+          <p:cNvPr id="210" name="Google Shape;210;g3e2b96a3b5e_0_123:notes"/>
           <p:cNvSpPr txBox="1"/>
           <p:nvPr>
             <p:ph idx="1" type="body"/>
@@ -1604,7 +1605,7 @@
       </p:sp>
       <p:sp>
         <p:nvSpPr>
-          <p:cNvPr id="210" name="Google Shape;210;g3e2b96a3b5e_0_133:notes"/>
+          <p:cNvPr id="211" name="Google Shape;211;g3e2b96a3b5e_0_123:notes"/>
           <p:cNvSpPr/>
           <p:nvPr>
             <p:ph idx="2" type="sldImg"/>
@@ -1660,7 +1661,7 @@
   <p:cSld>
     <p:spTree>
       <p:nvGrpSpPr>
-        <p:cNvPr id="217" name="Shape 217"/>
+        <p:cNvPr id="218" name="Shape 218"/>
         <p:cNvGrpSpPr/>
         <p:nvPr/>
       </p:nvGrpSpPr>
@@ -1674,7 +1675,7 @@
       </p:grpSpPr>
       <p:sp>
         <p:nvSpPr>
-          <p:cNvPr id="218" name="Google Shape;218;g3e2b96a3b5e_0_143:notes"/>
+          <p:cNvPr id="219" name="Google Shape;219;g3e2b96a3b5e_0_133:notes"/>
           <p:cNvSpPr txBox="1"/>
           <p:nvPr>
             <p:ph idx="1" type="body"/>
@@ -1721,7 +1722,124 @@
       </p:sp>
       <p:sp>
         <p:nvSpPr>
-          <p:cNvPr id="219" name="Google Shape;219;g3e2b96a3b5e_0_143:notes"/>
+          <p:cNvPr id="220" name="Google Shape;220;g3e2b96a3b5e_0_133:notes"/>
+          <p:cNvSpPr/>
+          <p:nvPr>
+            <p:ph idx="2" type="sldImg"/>
+          </p:nvPr>
+        </p:nvSpPr>
+        <p:spPr>
+          <a:xfrm>
+            <a:off x="1143225" y="685800"/>
+            <a:ext cx="4572300" cy="3429000"/>
+          </a:xfrm>
+          <a:custGeom>
+            <a:rect b="b" l="l" r="r" t="t"/>
+            <a:pathLst>
+              <a:path extrusionOk="0" h="120000" w="120000">
+                <a:moveTo>
+                  <a:pt x="0" y="0"/>
+                </a:moveTo>
+                <a:lnTo>
+                  <a:pt x="120000" y="0"/>
+                </a:lnTo>
+                <a:lnTo>
+                  <a:pt x="120000" y="120000"/>
+                </a:lnTo>
+                <a:lnTo>
+                  <a:pt x="0" y="120000"/>
+                </a:lnTo>
+                <a:close/>
+              </a:path>
+            </a:pathLst>
+          </a:custGeom>
+          <a:noFill/>
+          <a:ln cap="flat" cmpd="sng" w="9525">
+            <a:solidFill>
+              <a:srgbClr val="000000"/>
+            </a:solidFill>
+            <a:prstDash val="solid"/>
+            <a:round/>
+            <a:headEnd len="sm" w="sm" type="none"/>
+            <a:tailEnd len="sm" w="sm" type="none"/>
+          </a:ln>
+        </p:spPr>
+      </p:sp>
+    </p:spTree>
+  </p:cSld>
+  <p:clrMapOvr>
+    <a:masterClrMapping/>
+  </p:clrMapOvr>
+</p:notes>
+</file>
+
+<file path=ppt/notesSlides/notesSlide17.xml><?xml version="1.0" encoding="utf-8"?>
+<p:notes xmlns:a="http://schemas.openxmlformats.org/drawingml/2006/main" xmlns:r="http://schemas.openxmlformats.org/officeDocument/2006/relationships" xmlns:mc="http://schemas.openxmlformats.org/markup-compatibility/2006" xmlns:mv="urn:schemas-microsoft-com:mac:vml" xmlns:p="http://schemas.openxmlformats.org/presentationml/2006/main" xmlns:c="http://schemas.openxmlformats.org/drawingml/2006/chart" xmlns:dgm="http://schemas.openxmlformats.org/drawingml/2006/diagram" xmlns:o="urn:schemas-microsoft-com:office:office" xmlns:v="urn:schemas-microsoft-com:vml" xmlns:pvml="urn:schemas-microsoft-com:office:powerpoint" xmlns:com="http://schemas.openxmlformats.org/drawingml/2006/compatibility" xmlns:p14="http://schemas.microsoft.com/office/powerpoint/2010/main" xmlns:p15="http://schemas.microsoft.com/office/powerpoint/2012/main" xmlns:ahyp="http://schemas.microsoft.com/office/drawing/2018/hyperlinkcolor" showMasterPhAnim="0" showMasterSp="0">
+  <p:cSld>
+    <p:spTree>
+      <p:nvGrpSpPr>
+        <p:cNvPr id="227" name="Shape 227"/>
+        <p:cNvGrpSpPr/>
+        <p:nvPr/>
+      </p:nvGrpSpPr>
+      <p:grpSpPr>
+        <a:xfrm>
+          <a:off x="0" y="0"/>
+          <a:ext cx="0" cy="0"/>
+          <a:chOff x="0" y="0"/>
+          <a:chExt cx="0" cy="0"/>
+        </a:xfrm>
+      </p:grpSpPr>
+      <p:sp>
+        <p:nvSpPr>
+          <p:cNvPr id="228" name="Google Shape;228;g3e2b96a3b5e_0_143:notes"/>
+          <p:cNvSpPr txBox="1"/>
+          <p:nvPr>
+            <p:ph idx="1" type="body"/>
+          </p:nvPr>
+        </p:nvSpPr>
+        <p:spPr>
+          <a:xfrm>
+            <a:off x="685800" y="4343400"/>
+            <a:ext cx="5486400" cy="4114800"/>
+          </a:xfrm>
+          <a:prstGeom prst="rect">
+            <a:avLst/>
+          </a:prstGeom>
+          <a:noFill/>
+          <a:ln>
+            <a:noFill/>
+          </a:ln>
+        </p:spPr>
+        <p:txBody>
+          <a:bodyPr anchorCtr="0" anchor="t" bIns="91425" lIns="91425" spcFirstLastPara="1" rIns="91425" wrap="square" tIns="91425">
+            <a:noAutofit/>
+          </a:bodyPr>
+          <a:lstStyle/>
+          <a:p>
+            <a:pPr indent="0" lvl="0" marL="0" rtl="0" algn="l">
+              <a:lnSpc>
+                <a:spcPct val="100000"/>
+              </a:lnSpc>
+              <a:spcBef>
+                <a:spcPts val="0"/>
+              </a:spcBef>
+              <a:spcAft>
+                <a:spcPts val="0"/>
+              </a:spcAft>
+              <a:buSzPts val="1100"/>
+              <a:buNone/>
+            </a:pPr>
+            <a:r>
+              <a:t/>
+            </a:r>
+            <a:endParaRPr/>
+          </a:p>
+        </p:txBody>
+      </p:sp>
+      <p:sp>
+        <p:nvSpPr>
+          <p:cNvPr id="229" name="Google Shape;229;g3e2b96a3b5e_0_143:notes"/>
           <p:cNvSpPr/>
           <p:nvPr>
             <p:ph idx="2" type="sldImg"/>
@@ -2259,7 +2377,7 @@
       </p:grpSpPr>
       <p:sp>
         <p:nvSpPr>
-          <p:cNvPr id="126" name="Google Shape;126;g3e2b96a3b5e_0_23:notes"/>
+          <p:cNvPr id="126" name="Google Shape;126;g3e2bd998498_0_0:notes"/>
           <p:cNvSpPr txBox="1"/>
           <p:nvPr>
             <p:ph idx="1" type="body"/>
@@ -2306,7 +2424,7 @@
       </p:sp>
       <p:sp>
         <p:nvSpPr>
-          <p:cNvPr id="127" name="Google Shape;127;g3e2b96a3b5e_0_23:notes"/>
+          <p:cNvPr id="127" name="Google Shape;127;g3e2bd998498_0_0:notes"/>
           <p:cNvSpPr/>
           <p:nvPr>
             <p:ph idx="2" type="sldImg"/>
@@ -2362,7 +2480,7 @@
   <p:cSld>
     <p:spTree>
       <p:nvGrpSpPr>
-        <p:cNvPr id="134" name="Shape 134"/>
+        <p:cNvPr id="135" name="Shape 135"/>
         <p:cNvGrpSpPr/>
         <p:nvPr/>
       </p:nvGrpSpPr>
@@ -2376,7 +2494,7 @@
       </p:grpSpPr>
       <p:sp>
         <p:nvSpPr>
-          <p:cNvPr id="135" name="Google Shape;135;g3e2b96a3b5e_0_33:notes"/>
+          <p:cNvPr id="136" name="Google Shape;136;g3e2b96a3b5e_0_23:notes"/>
           <p:cNvSpPr txBox="1"/>
           <p:nvPr>
             <p:ph idx="1" type="body"/>
@@ -2423,7 +2541,7 @@
       </p:sp>
       <p:sp>
         <p:nvSpPr>
-          <p:cNvPr id="136" name="Google Shape;136;g3e2b96a3b5e_0_33:notes"/>
+          <p:cNvPr id="137" name="Google Shape;137;g3e2b96a3b5e_0_23:notes"/>
           <p:cNvSpPr/>
           <p:nvPr>
             <p:ph idx="2" type="sldImg"/>
@@ -2479,7 +2597,7 @@
   <p:cSld>
     <p:spTree>
       <p:nvGrpSpPr>
-        <p:cNvPr id="143" name="Shape 143"/>
+        <p:cNvPr id="144" name="Shape 144"/>
         <p:cNvGrpSpPr/>
         <p:nvPr/>
       </p:nvGrpSpPr>
@@ -2493,7 +2611,7 @@
       </p:grpSpPr>
       <p:sp>
         <p:nvSpPr>
-          <p:cNvPr id="144" name="Google Shape;144;g3e2b96a3b5e_0_43:notes"/>
+          <p:cNvPr id="145" name="Google Shape;145;g3e2b96a3b5e_0_33:notes"/>
           <p:cNvSpPr txBox="1"/>
           <p:nvPr>
             <p:ph idx="1" type="body"/>
@@ -2540,7 +2658,7 @@
       </p:sp>
       <p:sp>
         <p:nvSpPr>
-          <p:cNvPr id="145" name="Google Shape;145;g3e2b96a3b5e_0_43:notes"/>
+          <p:cNvPr id="146" name="Google Shape;146;g3e2b96a3b5e_0_33:notes"/>
           <p:cNvSpPr/>
           <p:nvPr>
             <p:ph idx="2" type="sldImg"/>
@@ -2596,7 +2714,7 @@
   <p:cSld>
     <p:spTree>
       <p:nvGrpSpPr>
-        <p:cNvPr id="152" name="Shape 152"/>
+        <p:cNvPr id="153" name="Shape 153"/>
         <p:cNvGrpSpPr/>
         <p:nvPr/>
       </p:nvGrpSpPr>
@@ -2610,7 +2728,7 @@
       </p:grpSpPr>
       <p:sp>
         <p:nvSpPr>
-          <p:cNvPr id="153" name="Google Shape;153;g3e2b96a3b5e_0_75:notes"/>
+          <p:cNvPr id="154" name="Google Shape;154;g3e2b96a3b5e_0_43:notes"/>
           <p:cNvSpPr txBox="1"/>
           <p:nvPr>
             <p:ph idx="1" type="body"/>
@@ -2657,7 +2775,7 @@
       </p:sp>
       <p:sp>
         <p:nvSpPr>
-          <p:cNvPr id="154" name="Google Shape;154;g3e2b96a3b5e_0_75:notes"/>
+          <p:cNvPr id="155" name="Google Shape;155;g3e2b96a3b5e_0_43:notes"/>
           <p:cNvSpPr/>
           <p:nvPr>
             <p:ph idx="2" type="sldImg"/>
@@ -16268,7 +16386,7 @@
     </p:bg>
     <p:spTree>
       <p:nvGrpSpPr>
-        <p:cNvPr id="164" name="Shape 164"/>
+        <p:cNvPr id="165" name="Shape 165"/>
         <p:cNvGrpSpPr/>
         <p:nvPr/>
       </p:nvGrpSpPr>
@@ -16282,7 +16400,7 @@
       </p:grpSpPr>
       <p:sp>
         <p:nvSpPr>
-          <p:cNvPr id="165" name="Google Shape;165;p22"/>
+          <p:cNvPr id="166" name="Google Shape;166;p22"/>
           <p:cNvSpPr/>
           <p:nvPr/>
         </p:nvSpPr>
@@ -16354,7 +16472,7 @@
       </p:sp>
       <p:sp>
         <p:nvSpPr>
-          <p:cNvPr id="166" name="Google Shape;166;p22"/>
+          <p:cNvPr id="167" name="Google Shape;167;p22"/>
           <p:cNvSpPr txBox="1"/>
           <p:nvPr/>
         </p:nvSpPr>
@@ -16420,7 +16538,7 @@
       </p:sp>
       <p:sp>
         <p:nvSpPr>
-          <p:cNvPr id="167" name="Google Shape;167;p22"/>
+          <p:cNvPr id="168" name="Google Shape;168;p22"/>
           <p:cNvSpPr/>
           <p:nvPr/>
         </p:nvSpPr>
@@ -16492,14 +16610,14 @@
       </p:sp>
       <p:sp>
         <p:nvSpPr>
-          <p:cNvPr id="168" name="Google Shape;168;p22"/>
+          <p:cNvPr id="169" name="Google Shape;169;p22"/>
           <p:cNvSpPr txBox="1"/>
           <p:nvPr/>
         </p:nvSpPr>
         <p:spPr>
           <a:xfrm>
             <a:off x="822950" y="1799275"/>
-            <a:ext cx="10058400" cy="354000"/>
+            <a:ext cx="10058400" cy="4530000"/>
           </a:xfrm>
           <a:prstGeom prst="rect">
             <a:avLst/>
@@ -16520,7 +16638,474 @@
                 <a:spcPct val="115000"/>
               </a:lnSpc>
               <a:spcBef>
+                <a:spcPts val="1800"/>
+              </a:spcBef>
+              <a:spcAft>
+                <a:spcPts val="0"/>
+              </a:spcAft>
+              <a:buClr>
+                <a:schemeClr val="dk1"/>
+              </a:buClr>
+              <a:buSzPts val="1100"/>
+              <a:buFont typeface="Arial"/>
+              <a:buNone/>
+            </a:pPr>
+            <a:r>
+              <a:rPr lang="en-US" sz="1500">
+                <a:solidFill>
+                  <a:schemeClr val="lt1"/>
+                </a:solidFill>
+              </a:rPr>
+              <a:t>ROC Curve (Top Graph)</a:t>
+            </a:r>
+            <a:endParaRPr sz="1500">
+              <a:solidFill>
+                <a:schemeClr val="lt1"/>
+              </a:solidFill>
+            </a:endParaRPr>
+          </a:p>
+          <a:p>
+            <a:pPr indent="0" lvl="0" marL="0" rtl="0" algn="l">
+              <a:lnSpc>
+                <a:spcPct val="115000"/>
+              </a:lnSpc>
+              <a:spcBef>
+                <a:spcPts val="900"/>
+              </a:spcBef>
+              <a:spcAft>
+                <a:spcPts val="0"/>
+              </a:spcAft>
+              <a:buClr>
+                <a:schemeClr val="dk1"/>
+              </a:buClr>
+              <a:buSzPts val="1100"/>
+              <a:buFont typeface="Arial"/>
+              <a:buNone/>
+            </a:pPr>
+            <a:r>
+              <a:rPr lang="en-US" sz="1200">
+                <a:solidFill>
+                  <a:schemeClr val="lt1"/>
+                </a:solidFill>
+              </a:rPr>
+              <a:t>An ROC curve measures how well a model separates positive and negative classes.</a:t>
+            </a:r>
+            <a:endParaRPr sz="1200">
+              <a:solidFill>
+                <a:schemeClr val="lt1"/>
+              </a:solidFill>
+            </a:endParaRPr>
+          </a:p>
+          <a:p>
+            <a:pPr indent="-304800" lvl="0" marL="457200" rtl="0" algn="l">
+              <a:lnSpc>
+                <a:spcPct val="115000"/>
+              </a:lnSpc>
+              <a:spcBef>
                 <a:spcPts val="1200"/>
+              </a:spcBef>
+              <a:spcAft>
+                <a:spcPts val="0"/>
+              </a:spcAft>
+              <a:buClr>
+                <a:schemeClr val="lt1"/>
+              </a:buClr>
+              <a:buSzPts val="1200"/>
+              <a:buChar char="●"/>
+            </a:pPr>
+            <a:r>
+              <a:rPr b="1" lang="en-US" sz="1200">
+                <a:solidFill>
+                  <a:schemeClr val="lt1"/>
+                </a:solidFill>
+              </a:rPr>
+              <a:t>AUC = 0.55</a:t>
+            </a:r>
+            <a:r>
+              <a:rPr lang="en-US" sz="1200">
+                <a:solidFill>
+                  <a:schemeClr val="lt1"/>
+                </a:solidFill>
+              </a:rPr>
+              <a:t>: Shows almost zero predictive power.</a:t>
+            </a:r>
+            <a:endParaRPr sz="1200">
+              <a:solidFill>
+                <a:schemeClr val="lt1"/>
+              </a:solidFill>
+            </a:endParaRPr>
+          </a:p>
+          <a:p>
+            <a:pPr indent="-304800" lvl="0" marL="457200" rtl="0" algn="l">
+              <a:lnSpc>
+                <a:spcPct val="115000"/>
+              </a:lnSpc>
+              <a:spcBef>
+                <a:spcPts val="0"/>
+              </a:spcBef>
+              <a:spcAft>
+                <a:spcPts val="0"/>
+              </a:spcAft>
+              <a:buClr>
+                <a:schemeClr val="lt1"/>
+              </a:buClr>
+              <a:buSzPts val="1200"/>
+              <a:buChar char="●"/>
+            </a:pPr>
+            <a:r>
+              <a:rPr b="1" lang="en-US" sz="1200">
+                <a:solidFill>
+                  <a:schemeClr val="lt1"/>
+                </a:solidFill>
+              </a:rPr>
+              <a:t>Baseline comparison</a:t>
+            </a:r>
+            <a:r>
+              <a:rPr lang="en-US" sz="1200">
+                <a:solidFill>
+                  <a:schemeClr val="lt1"/>
+                </a:solidFill>
+              </a:rPr>
+              <a:t>: Random guessing gives an AUC of 0.50.</a:t>
+            </a:r>
+            <a:endParaRPr sz="1200">
+              <a:solidFill>
+                <a:schemeClr val="lt1"/>
+              </a:solidFill>
+            </a:endParaRPr>
+          </a:p>
+          <a:p>
+            <a:pPr indent="-304800" lvl="0" marL="457200" rtl="0" algn="l">
+              <a:lnSpc>
+                <a:spcPct val="115000"/>
+              </a:lnSpc>
+              <a:spcBef>
+                <a:spcPts val="0"/>
+              </a:spcBef>
+              <a:spcAft>
+                <a:spcPts val="0"/>
+              </a:spcAft>
+              <a:buClr>
+                <a:schemeClr val="lt1"/>
+              </a:buClr>
+              <a:buSzPts val="1200"/>
+              <a:buChar char="●"/>
+            </a:pPr>
+            <a:r>
+              <a:rPr b="1" lang="en-US" sz="1200">
+                <a:solidFill>
+                  <a:schemeClr val="lt1"/>
+                </a:solidFill>
+              </a:rPr>
+              <a:t>Diagonal line</a:t>
+            </a:r>
+            <a:r>
+              <a:rPr lang="en-US" sz="1200">
+                <a:solidFill>
+                  <a:schemeClr val="lt1"/>
+                </a:solidFill>
+              </a:rPr>
+              <a:t>: Your curve closely hugs the random line.</a:t>
+            </a:r>
+            <a:endParaRPr sz="1200">
+              <a:solidFill>
+                <a:schemeClr val="lt1"/>
+              </a:solidFill>
+            </a:endParaRPr>
+          </a:p>
+          <a:p>
+            <a:pPr indent="-304800" lvl="0" marL="457200" rtl="0" algn="l">
+              <a:lnSpc>
+                <a:spcPct val="115000"/>
+              </a:lnSpc>
+              <a:spcBef>
+                <a:spcPts val="0"/>
+              </a:spcBef>
+              <a:spcAft>
+                <a:spcPts val="0"/>
+              </a:spcAft>
+              <a:buClr>
+                <a:schemeClr val="lt1"/>
+              </a:buClr>
+              <a:buSzPts val="1200"/>
+              <a:buChar char="●"/>
+            </a:pPr>
+            <a:r>
+              <a:rPr b="1" lang="en-US" sz="1200">
+                <a:solidFill>
+                  <a:schemeClr val="lt1"/>
+                </a:solidFill>
+              </a:rPr>
+              <a:t>Conclusion</a:t>
+            </a:r>
+            <a:r>
+              <a:rPr lang="en-US" sz="1200">
+                <a:solidFill>
+                  <a:schemeClr val="lt1"/>
+                </a:solidFill>
+              </a:rPr>
+              <a:t>: The model cannot reliably distinguish classes.</a:t>
+            </a:r>
+            <a:endParaRPr sz="1200">
+              <a:solidFill>
+                <a:schemeClr val="lt1"/>
+              </a:solidFill>
+            </a:endParaRPr>
+          </a:p>
+          <a:p>
+            <a:pPr indent="0" lvl="0" marL="0" rtl="0" algn="l">
+              <a:lnSpc>
+                <a:spcPct val="115000"/>
+              </a:lnSpc>
+              <a:spcBef>
+                <a:spcPts val="2100"/>
+              </a:spcBef>
+              <a:spcAft>
+                <a:spcPts val="0"/>
+              </a:spcAft>
+              <a:buClr>
+                <a:schemeClr val="dk1"/>
+              </a:buClr>
+              <a:buSzPts val="1100"/>
+              <a:buFont typeface="Arial"/>
+              <a:buNone/>
+            </a:pPr>
+            <a:r>
+              <a:t/>
+            </a:r>
+            <a:endParaRPr sz="1200">
+              <a:solidFill>
+                <a:schemeClr val="lt1"/>
+              </a:solidFill>
+            </a:endParaRPr>
+          </a:p>
+          <a:p>
+            <a:pPr indent="0" lvl="0" marL="0" rtl="0" algn="l">
+              <a:lnSpc>
+                <a:spcPct val="115000"/>
+              </a:lnSpc>
+              <a:spcBef>
+                <a:spcPts val="1800"/>
+              </a:spcBef>
+              <a:spcAft>
+                <a:spcPts val="0"/>
+              </a:spcAft>
+              <a:buClr>
+                <a:schemeClr val="dk1"/>
+              </a:buClr>
+              <a:buSzPts val="1100"/>
+              <a:buFont typeface="Arial"/>
+              <a:buNone/>
+            </a:pPr>
+            <a:r>
+              <a:rPr lang="en-US" sz="1500">
+                <a:solidFill>
+                  <a:schemeClr val="lt1"/>
+                </a:solidFill>
+              </a:rPr>
+              <a:t>📉 Precision-Recall Curve (Bottom Graph)</a:t>
+            </a:r>
+            <a:endParaRPr sz="1500">
+              <a:solidFill>
+                <a:schemeClr val="lt1"/>
+              </a:solidFill>
+            </a:endParaRPr>
+          </a:p>
+          <a:p>
+            <a:pPr indent="0" lvl="0" marL="0" rtl="0" algn="l">
+              <a:lnSpc>
+                <a:spcPct val="115000"/>
+              </a:lnSpc>
+              <a:spcBef>
+                <a:spcPts val="900"/>
+              </a:spcBef>
+              <a:spcAft>
+                <a:spcPts val="0"/>
+              </a:spcAft>
+              <a:buClr>
+                <a:schemeClr val="dk1"/>
+              </a:buClr>
+              <a:buSzPts val="1100"/>
+              <a:buFont typeface="Arial"/>
+              <a:buNone/>
+            </a:pPr>
+            <a:r>
+              <a:rPr lang="en-US" sz="1200">
+                <a:solidFill>
+                  <a:schemeClr val="lt1"/>
+                </a:solidFill>
+              </a:rPr>
+              <a:t>This curve evaluates performance when dealing with imbalanced datasets.</a:t>
+            </a:r>
+            <a:endParaRPr sz="1200">
+              <a:solidFill>
+                <a:schemeClr val="lt1"/>
+              </a:solidFill>
+            </a:endParaRPr>
+          </a:p>
+          <a:p>
+            <a:pPr indent="-304800" lvl="0" marL="457200" rtl="0" algn="l">
+              <a:lnSpc>
+                <a:spcPct val="115000"/>
+              </a:lnSpc>
+              <a:spcBef>
+                <a:spcPts val="1200"/>
+              </a:spcBef>
+              <a:spcAft>
+                <a:spcPts val="0"/>
+              </a:spcAft>
+              <a:buClr>
+                <a:schemeClr val="lt1"/>
+              </a:buClr>
+              <a:buSzPts val="1200"/>
+              <a:buChar char="●"/>
+            </a:pPr>
+            <a:r>
+              <a:rPr b="1" lang="en-US" sz="1200">
+                <a:solidFill>
+                  <a:schemeClr val="lt1"/>
+                </a:solidFill>
+              </a:rPr>
+              <a:t>Flat line</a:t>
+            </a:r>
+            <a:r>
+              <a:rPr lang="en-US" sz="1200">
+                <a:solidFill>
+                  <a:schemeClr val="lt1"/>
+                </a:solidFill>
+              </a:rPr>
+              <a:t>: Precision stays constant near 0.20.</a:t>
+            </a:r>
+            <a:endParaRPr sz="1200">
+              <a:solidFill>
+                <a:schemeClr val="lt1"/>
+              </a:solidFill>
+            </a:endParaRPr>
+          </a:p>
+          <a:p>
+            <a:pPr indent="-304800" lvl="0" marL="457200" rtl="0" algn="l">
+              <a:lnSpc>
+                <a:spcPct val="115000"/>
+              </a:lnSpc>
+              <a:spcBef>
+                <a:spcPts val="0"/>
+              </a:spcBef>
+              <a:spcAft>
+                <a:spcPts val="0"/>
+              </a:spcAft>
+              <a:buClr>
+                <a:schemeClr val="lt1"/>
+              </a:buClr>
+              <a:buSzPts val="1200"/>
+              <a:buChar char="●"/>
+            </a:pPr>
+            <a:r>
+              <a:rPr b="1" lang="en-US" sz="1200">
+                <a:solidFill>
+                  <a:schemeClr val="lt1"/>
+                </a:solidFill>
+              </a:rPr>
+              <a:t>Class imbalance</a:t>
+            </a:r>
+            <a:r>
+              <a:rPr lang="en-US" sz="1200">
+                <a:solidFill>
+                  <a:schemeClr val="lt1"/>
+                </a:solidFill>
+              </a:rPr>
+              <a:t>: The positive class likely represents 20% of data.</a:t>
+            </a:r>
+            <a:endParaRPr sz="1200">
+              <a:solidFill>
+                <a:schemeClr val="lt1"/>
+              </a:solidFill>
+            </a:endParaRPr>
+          </a:p>
+          <a:p>
+            <a:pPr indent="-304800" lvl="0" marL="457200" rtl="0" algn="l">
+              <a:lnSpc>
+                <a:spcPct val="115000"/>
+              </a:lnSpc>
+              <a:spcBef>
+                <a:spcPts val="0"/>
+              </a:spcBef>
+              <a:spcAft>
+                <a:spcPts val="0"/>
+              </a:spcAft>
+              <a:buClr>
+                <a:schemeClr val="lt1"/>
+              </a:buClr>
+              <a:buSzPts val="1200"/>
+              <a:buChar char="●"/>
+            </a:pPr>
+            <a:r>
+              <a:rPr b="1" lang="en-US" sz="1200">
+                <a:solidFill>
+                  <a:schemeClr val="lt1"/>
+                </a:solidFill>
+              </a:rPr>
+              <a:t>High recall trap</a:t>
+            </a:r>
+            <a:r>
+              <a:rPr lang="en-US" sz="1200">
+                <a:solidFill>
+                  <a:schemeClr val="lt1"/>
+                </a:solidFill>
+              </a:rPr>
+              <a:t>: Increasing recall does not improve precision.</a:t>
+            </a:r>
+            <a:endParaRPr sz="1200">
+              <a:solidFill>
+                <a:schemeClr val="lt1"/>
+              </a:solidFill>
+            </a:endParaRPr>
+          </a:p>
+          <a:p>
+            <a:pPr indent="-304800" lvl="0" marL="457200" rtl="0" algn="l">
+              <a:lnSpc>
+                <a:spcPct val="115000"/>
+              </a:lnSpc>
+              <a:spcBef>
+                <a:spcPts val="0"/>
+              </a:spcBef>
+              <a:spcAft>
+                <a:spcPts val="0"/>
+              </a:spcAft>
+              <a:buClr>
+                <a:schemeClr val="lt1"/>
+              </a:buClr>
+              <a:buSzPts val="1200"/>
+              <a:buChar char="●"/>
+            </a:pPr>
+            <a:r>
+              <a:rPr b="1" lang="en-US" sz="1200">
+                <a:solidFill>
+                  <a:schemeClr val="lt1"/>
+                </a:solidFill>
+              </a:rPr>
+              <a:t>Conclusion</a:t>
+            </a:r>
+            <a:r>
+              <a:rPr lang="en-US" sz="1200">
+                <a:solidFill>
+                  <a:schemeClr val="lt1"/>
+                </a:solidFill>
+              </a:rPr>
+              <a:t>: The model behaves like a random classifier.</a:t>
+            </a:r>
+            <a:endParaRPr sz="1200">
+              <a:solidFill>
+                <a:schemeClr val="lt1"/>
+              </a:solidFill>
+            </a:endParaRPr>
+          </a:p>
+          <a:p>
+            <a:pPr indent="0" lvl="0" marL="0" rtl="0" algn="l">
+              <a:lnSpc>
+                <a:spcPct val="115000"/>
+              </a:lnSpc>
+              <a:spcBef>
+                <a:spcPts val="2100"/>
               </a:spcBef>
               <a:spcAft>
                 <a:spcPts val="1200"/>
@@ -16545,7 +17130,7 @@
       </p:sp>
       <p:sp>
         <p:nvSpPr>
-          <p:cNvPr id="169" name="Google Shape;169;p22"/>
+          <p:cNvPr id="170" name="Google Shape;170;p22"/>
           <p:cNvSpPr txBox="1"/>
           <p:nvPr/>
         </p:nvSpPr>
@@ -16609,34 +17194,6 @@
           </a:p>
         </p:txBody>
       </p:sp>
-      <p:pic>
-        <p:nvPicPr>
-          <p:cNvPr id="170" name="Google Shape;170;p22"/>
-          <p:cNvPicPr preferRelativeResize="0"/>
-          <p:nvPr/>
-        </p:nvPicPr>
-        <p:blipFill>
-          <a:blip r:embed="rId3">
-            <a:alphaModFix/>
-          </a:blip>
-          <a:stretch>
-            <a:fillRect/>
-          </a:stretch>
-        </p:blipFill>
-        <p:spPr>
-          <a:xfrm>
-            <a:off x="1280150" y="1906950"/>
-            <a:ext cx="4371975" cy="4181475"/>
-          </a:xfrm>
-          <a:prstGeom prst="rect">
-            <a:avLst/>
-          </a:prstGeom>
-          <a:noFill/>
-          <a:ln>
-            <a:noFill/>
-          </a:ln>
-        </p:spPr>
-      </p:pic>
     </p:spTree>
   </p:cSld>
   <p:clrMapOvr>
@@ -17014,8 +17571,8 @@
         </p:blipFill>
         <p:spPr>
           <a:xfrm>
-            <a:off x="1358525" y="1799275"/>
-            <a:ext cx="4381500" cy="4229100"/>
+            <a:off x="1280150" y="1906950"/>
+            <a:ext cx="4371975" cy="4181475"/>
           </a:xfrm>
           <a:prstGeom prst="rect">
             <a:avLst/>
@@ -17182,7 +17739,7 @@
                 <a:cs typeface="Georgia"/>
                 <a:sym typeface="Georgia"/>
               </a:rPr>
-              <a:t>Recommended Next Steps </a:t>
+              <a:t>Results &amp; Observations </a:t>
             </a:r>
             <a:endParaRPr b="0" i="0" sz="1400" u="none" cap="none" strike="noStrike">
               <a:solidFill>
@@ -17277,7 +17834,7 @@
         <p:spPr>
           <a:xfrm>
             <a:off x="822950" y="1799275"/>
-            <a:ext cx="10058400" cy="2290200"/>
+            <a:ext cx="10058400" cy="354000"/>
           </a:xfrm>
           <a:prstGeom prst="rect">
             <a:avLst/>
@@ -17298,232 +17855,22 @@
                 <a:spcPct val="115000"/>
               </a:lnSpc>
               <a:spcBef>
-                <a:spcPts val="900"/>
-              </a:spcBef>
-              <a:spcAft>
-                <a:spcPts val="0"/>
+                <a:spcPts val="1200"/>
+              </a:spcBef>
+              <a:spcAft>
+                <a:spcPts val="1200"/>
               </a:spcAft>
               <a:buClr>
                 <a:schemeClr val="dk1"/>
               </a:buClr>
               <a:buSzPts val="1100"/>
               <a:buFont typeface="Arial"/>
-              <a:buNone/>
-            </a:pPr>
-            <a:r>
-              <a:rPr lang="en-US" sz="1200">
-                <a:solidFill>
-                  <a:schemeClr val="lt1"/>
-                </a:solidFill>
-              </a:rPr>
-              <a:t>To improve these results:</a:t>
-            </a:r>
-            <a:endParaRPr sz="1200">
-              <a:solidFill>
-                <a:schemeClr val="lt1"/>
-              </a:solidFill>
-            </a:endParaRPr>
-          </a:p>
-          <a:p>
-            <a:pPr indent="-304800" lvl="0" marL="457200" rtl="0" algn="l">
-              <a:lnSpc>
-                <a:spcPct val="115000"/>
-              </a:lnSpc>
-              <a:spcBef>
-                <a:spcPts val="1200"/>
-              </a:spcBef>
-              <a:spcAft>
-                <a:spcPts val="0"/>
-              </a:spcAft>
-              <a:buClr>
-                <a:schemeClr val="lt1"/>
-              </a:buClr>
-              <a:buSzPts val="1200"/>
-              <a:buChar char="●"/>
-            </a:pPr>
-            <a:r>
-              <a:rPr b="1" lang="en-US" sz="1200">
-                <a:solidFill>
-                  <a:schemeClr val="lt1"/>
-                </a:solidFill>
-              </a:rPr>
-              <a:t>Feature engineering</a:t>
-            </a:r>
-            <a:r>
-              <a:rPr lang="en-US" sz="1200">
-                <a:solidFill>
-                  <a:schemeClr val="lt1"/>
-                </a:solidFill>
-              </a:rPr>
-              <a:t>: Add more informative predictive variables.</a:t>
-            </a:r>
-            <a:endParaRPr sz="1200">
-              <a:solidFill>
-                <a:schemeClr val="lt1"/>
-              </a:solidFill>
-            </a:endParaRPr>
-          </a:p>
-          <a:p>
-            <a:pPr indent="-304800" lvl="0" marL="457200" rtl="0" algn="l">
-              <a:lnSpc>
-                <a:spcPct val="115000"/>
-              </a:lnSpc>
-              <a:spcBef>
-                <a:spcPts val="0"/>
-              </a:spcBef>
-              <a:spcAft>
-                <a:spcPts val="0"/>
-              </a:spcAft>
-              <a:buClr>
-                <a:schemeClr val="lt1"/>
-              </a:buClr>
-              <a:buSzPts val="1200"/>
-              <a:buChar char="●"/>
-            </a:pPr>
-            <a:r>
-              <a:rPr b="1" lang="en-US" sz="1200">
-                <a:solidFill>
-                  <a:schemeClr val="lt1"/>
-                </a:solidFill>
-              </a:rPr>
-              <a:t>Fix imbalance</a:t>
-            </a:r>
-            <a:r>
-              <a:rPr lang="en-US" sz="1200">
-                <a:solidFill>
-                  <a:schemeClr val="lt1"/>
-                </a:solidFill>
-              </a:rPr>
-              <a:t>: Use oversampling (SMOTE) or undersampling.</a:t>
-            </a:r>
-            <a:endParaRPr sz="1200">
-              <a:solidFill>
-                <a:schemeClr val="lt1"/>
-              </a:solidFill>
-            </a:endParaRPr>
-          </a:p>
-          <a:p>
-            <a:pPr indent="-304800" lvl="0" marL="457200" rtl="0" algn="l">
-              <a:lnSpc>
-                <a:spcPct val="115000"/>
-              </a:lnSpc>
-              <a:spcBef>
-                <a:spcPts val="0"/>
-              </a:spcBef>
-              <a:spcAft>
-                <a:spcPts val="0"/>
-              </a:spcAft>
-              <a:buClr>
-                <a:schemeClr val="lt1"/>
-              </a:buClr>
-              <a:buSzPts val="1200"/>
-              <a:buChar char="●"/>
-            </a:pPr>
-            <a:r>
-              <a:rPr b="1" lang="en-US" sz="1200">
-                <a:solidFill>
-                  <a:schemeClr val="lt1"/>
-                </a:solidFill>
-              </a:rPr>
-              <a:t>Model tuning</a:t>
-            </a:r>
-            <a:r>
-              <a:rPr lang="en-US" sz="1200">
-                <a:solidFill>
-                  <a:schemeClr val="lt1"/>
-                </a:solidFill>
-              </a:rPr>
-              <a:t>: Adjust hyper-parameters or try different algorithms.</a:t>
-            </a:r>
-            <a:endParaRPr sz="1200">
-              <a:solidFill>
-                <a:schemeClr val="lt1"/>
-              </a:solidFill>
-            </a:endParaRPr>
-          </a:p>
-          <a:p>
-            <a:pPr indent="-304800" lvl="0" marL="457200" rtl="0" algn="l">
-              <a:lnSpc>
-                <a:spcPct val="115000"/>
-              </a:lnSpc>
-              <a:spcBef>
-                <a:spcPts val="0"/>
-              </a:spcBef>
-              <a:spcAft>
-                <a:spcPts val="0"/>
-              </a:spcAft>
-              <a:buClr>
-                <a:schemeClr val="lt1"/>
-              </a:buClr>
-              <a:buSzPts val="1200"/>
-              <a:buChar char="●"/>
-            </a:pPr>
-            <a:r>
-              <a:rPr b="1" lang="en-US" sz="1200">
-                <a:solidFill>
-                  <a:schemeClr val="lt1"/>
-                </a:solidFill>
-              </a:rPr>
-              <a:t>Check labels</a:t>
-            </a:r>
-            <a:r>
-              <a:rPr lang="en-US" sz="1200">
-                <a:solidFill>
-                  <a:schemeClr val="lt1"/>
-                </a:solidFill>
-              </a:rPr>
-              <a:t>: Ensure training data targets are correct.</a:t>
-            </a:r>
-            <a:endParaRPr sz="1200">
-              <a:solidFill>
-                <a:schemeClr val="lt1"/>
-              </a:solidFill>
-            </a:endParaRPr>
-          </a:p>
-          <a:p>
-            <a:pPr indent="0" lvl="0" marL="457200" rtl="0" algn="l">
-              <a:lnSpc>
-                <a:spcPct val="115000"/>
-              </a:lnSpc>
-              <a:spcBef>
-                <a:spcPts val="2100"/>
-              </a:spcBef>
-              <a:spcAft>
-                <a:spcPts val="0"/>
-              </a:spcAft>
               <a:buNone/>
             </a:pPr>
             <a:r>
               <a:t/>
             </a:r>
-            <a:endParaRPr sz="1200">
-              <a:solidFill>
-                <a:schemeClr val="lt1"/>
-              </a:solidFill>
-            </a:endParaRPr>
-          </a:p>
-          <a:p>
-            <a:pPr indent="0" lvl="0" marL="0" rtl="0" algn="l">
-              <a:lnSpc>
-                <a:spcPct val="115000"/>
-              </a:lnSpc>
-              <a:spcBef>
-                <a:spcPts val="2100"/>
-              </a:spcBef>
-              <a:spcAft>
-                <a:spcPts val="1200"/>
-              </a:spcAft>
-              <a:buClr>
-                <a:schemeClr val="dk1"/>
-              </a:buClr>
-              <a:buSzPts val="1100"/>
-              <a:buFont typeface="Arial"/>
-              <a:buNone/>
-            </a:pPr>
-            <a:r>
-              <a:t/>
-            </a:r>
-            <a:endParaRPr sz="1500">
+            <a:endParaRPr b="1" sz="1700">
               <a:solidFill>
                 <a:schemeClr val="lt1"/>
               </a:solidFill>
@@ -17597,6 +17944,34 @@
           </a:p>
         </p:txBody>
       </p:sp>
+      <p:pic>
+        <p:nvPicPr>
+          <p:cNvPr id="190" name="Google Shape;190;p24"/>
+          <p:cNvPicPr preferRelativeResize="0"/>
+          <p:nvPr/>
+        </p:nvPicPr>
+        <p:blipFill>
+          <a:blip r:embed="rId3">
+            <a:alphaModFix/>
+          </a:blip>
+          <a:stretch>
+            <a:fillRect/>
+          </a:stretch>
+        </p:blipFill>
+        <p:spPr>
+          <a:xfrm>
+            <a:off x="1358525" y="1799275"/>
+            <a:ext cx="4381500" cy="4229100"/>
+          </a:xfrm>
+          <a:prstGeom prst="rect">
+            <a:avLst/>
+          </a:prstGeom>
+          <a:noFill/>
+          <a:ln>
+            <a:noFill/>
+          </a:ln>
+        </p:spPr>
+      </p:pic>
     </p:spTree>
   </p:cSld>
   <p:clrMapOvr>
@@ -17617,7 +17992,7 @@
     </p:bg>
     <p:spTree>
       <p:nvGrpSpPr>
-        <p:cNvPr id="193" name="Shape 193"/>
+        <p:cNvPr id="194" name="Shape 194"/>
         <p:cNvGrpSpPr/>
         <p:nvPr/>
       </p:nvGrpSpPr>
@@ -17631,7 +18006,7 @@
       </p:grpSpPr>
       <p:sp>
         <p:nvSpPr>
-          <p:cNvPr id="194" name="Google Shape;194;p25"/>
+          <p:cNvPr id="195" name="Google Shape;195;p25"/>
           <p:cNvSpPr/>
           <p:nvPr/>
         </p:nvSpPr>
@@ -17703,7 +18078,7 @@
       </p:sp>
       <p:sp>
         <p:nvSpPr>
-          <p:cNvPr id="195" name="Google Shape;195;p25"/>
+          <p:cNvPr id="196" name="Google Shape;196;p25"/>
           <p:cNvSpPr txBox="1"/>
           <p:nvPr/>
         </p:nvSpPr>
@@ -17753,7 +18128,7 @@
                 <a:cs typeface="Georgia"/>
                 <a:sym typeface="Georgia"/>
               </a:rPr>
-              <a:t>Emerging Systems </a:t>
+              <a:t>Recommended Next Steps </a:t>
             </a:r>
             <a:endParaRPr b="0" i="0" sz="1400" u="none" cap="none" strike="noStrike">
               <a:solidFill>
@@ -17769,7 +18144,7 @@
       </p:sp>
       <p:sp>
         <p:nvSpPr>
-          <p:cNvPr id="196" name="Google Shape;196;p25"/>
+          <p:cNvPr id="197" name="Google Shape;197;p25"/>
           <p:cNvSpPr/>
           <p:nvPr/>
         </p:nvSpPr>
@@ -17841,14 +18216,14 @@
       </p:sp>
       <p:sp>
         <p:nvSpPr>
-          <p:cNvPr id="197" name="Google Shape;197;p25"/>
+          <p:cNvPr id="198" name="Google Shape;198;p25"/>
           <p:cNvSpPr txBox="1"/>
           <p:nvPr/>
         </p:nvSpPr>
         <p:spPr>
           <a:xfrm>
             <a:off x="822950" y="1799275"/>
-            <a:ext cx="10058400" cy="1280700"/>
+            <a:ext cx="10058400" cy="2290200"/>
           </a:xfrm>
           <a:prstGeom prst="rect">
             <a:avLst/>
@@ -17864,21 +18239,22 @@
           </a:bodyPr>
           <a:lstStyle/>
           <a:p>
-            <a:pPr indent="-304800" lvl="0" marL="457200" rtl="0" algn="l">
+            <a:pPr indent="0" lvl="0" marL="0" rtl="0" algn="l">
               <a:lnSpc>
                 <a:spcPct val="115000"/>
               </a:lnSpc>
               <a:spcBef>
-                <a:spcPts val="1200"/>
-              </a:spcBef>
-              <a:spcAft>
-                <a:spcPts val="0"/>
-              </a:spcAft>
-              <a:buClr>
-                <a:schemeClr val="lt1"/>
-              </a:buClr>
-              <a:buSzPts val="1200"/>
-              <a:buChar char="●"/>
+                <a:spcPts val="900"/>
+              </a:spcBef>
+              <a:spcAft>
+                <a:spcPts val="0"/>
+              </a:spcAft>
+              <a:buClr>
+                <a:schemeClr val="dk1"/>
+              </a:buClr>
+              <a:buSzPts val="1100"/>
+              <a:buFont typeface="Arial"/>
+              <a:buNone/>
             </a:pPr>
             <a:r>
               <a:rPr lang="en-US" sz="1200">
@@ -17886,7 +18262,7 @@
                   <a:schemeClr val="lt1"/>
                 </a:solidFill>
               </a:rPr>
-              <a:t>CNN + LSTM (temporal modeling)</a:t>
+              <a:t>To improve these results:</a:t>
             </a:r>
             <a:endParaRPr sz="1200">
               <a:solidFill>
@@ -17900,7 +18276,7 @@
                 <a:spcPct val="115000"/>
               </a:lnSpc>
               <a:spcBef>
-                <a:spcPts val="0"/>
+                <a:spcPts val="1200"/>
               </a:spcBef>
               <a:spcAft>
                 <a:spcPts val="0"/>
@@ -17912,12 +18288,20 @@
               <a:buChar char="●"/>
             </a:pPr>
             <a:r>
+              <a:rPr b="1" lang="en-US" sz="1200">
+                <a:solidFill>
+                  <a:schemeClr val="lt1"/>
+                </a:solidFill>
+              </a:rPr>
+              <a:t>Feature engineering</a:t>
+            </a:r>
+            <a:r>
               <a:rPr lang="en-US" sz="1200">
                 <a:solidFill>
                   <a:schemeClr val="lt1"/>
                 </a:solidFill>
               </a:rPr>
-              <a:t>Transformer-based vision models</a:t>
+              <a:t>: Add more informative predictive variables.</a:t>
             </a:r>
             <a:endParaRPr sz="1200">
               <a:solidFill>
@@ -17943,12 +18327,20 @@
               <a:buChar char="●"/>
             </a:pPr>
             <a:r>
+              <a:rPr b="1" lang="en-US" sz="1200">
+                <a:solidFill>
+                  <a:schemeClr val="lt1"/>
+                </a:solidFill>
+              </a:rPr>
+              <a:t>Fix imbalance</a:t>
+            </a:r>
+            <a:r>
               <a:rPr lang="en-US" sz="1200">
                 <a:solidFill>
                   <a:schemeClr val="lt1"/>
                 </a:solidFill>
               </a:rPr>
-              <a:t>Multimodal systems (video + audio + EEG)</a:t>
+              <a:t>: Use oversampling (SMOTE) or undersampling.</a:t>
             </a:r>
             <a:endParaRPr sz="1200">
               <a:solidFill>
@@ -17974,12 +18366,20 @@
               <a:buChar char="●"/>
             </a:pPr>
             <a:r>
+              <a:rPr b="1" lang="en-US" sz="1200">
+                <a:solidFill>
+                  <a:schemeClr val="lt1"/>
+                </a:solidFill>
+              </a:rPr>
+              <a:t>Model tuning</a:t>
+            </a:r>
+            <a:r>
               <a:rPr lang="en-US" sz="1200">
                 <a:solidFill>
                   <a:schemeClr val="lt1"/>
                 </a:solidFill>
               </a:rPr>
-              <a:t>Attention-based facial analysis</a:t>
+              <a:t>: Adjust hyper-parameters or try different algorithms.</a:t>
             </a:r>
             <a:endParaRPr sz="1200">
               <a:solidFill>
@@ -17988,21 +18388,55 @@
             </a:endParaRPr>
           </a:p>
           <a:p>
-            <a:pPr indent="0" lvl="0" marL="0" rtl="0" algn="l">
+            <a:pPr indent="-304800" lvl="0" marL="457200" rtl="0" algn="l">
               <a:lnSpc>
                 <a:spcPct val="115000"/>
               </a:lnSpc>
               <a:spcBef>
-                <a:spcPts val="1200"/>
-              </a:spcBef>
-              <a:spcAft>
-                <a:spcPts val="1200"/>
-              </a:spcAft>
-              <a:buClr>
-                <a:schemeClr val="dk1"/>
-              </a:buClr>
-              <a:buSzPts val="1100"/>
-              <a:buFont typeface="Arial"/>
+                <a:spcPts val="0"/>
+              </a:spcBef>
+              <a:spcAft>
+                <a:spcPts val="0"/>
+              </a:spcAft>
+              <a:buClr>
+                <a:schemeClr val="lt1"/>
+              </a:buClr>
+              <a:buSzPts val="1200"/>
+              <a:buChar char="●"/>
+            </a:pPr>
+            <a:r>
+              <a:rPr b="1" lang="en-US" sz="1200">
+                <a:solidFill>
+                  <a:schemeClr val="lt1"/>
+                </a:solidFill>
+              </a:rPr>
+              <a:t>Check labels</a:t>
+            </a:r>
+            <a:r>
+              <a:rPr lang="en-US" sz="1200">
+                <a:solidFill>
+                  <a:schemeClr val="lt1"/>
+                </a:solidFill>
+              </a:rPr>
+              <a:t>: Ensure training data targets are correct.</a:t>
+            </a:r>
+            <a:endParaRPr sz="1200">
+              <a:solidFill>
+                <a:schemeClr val="lt1"/>
+              </a:solidFill>
+            </a:endParaRPr>
+          </a:p>
+          <a:p>
+            <a:pPr indent="0" lvl="0" marL="457200" rtl="0" algn="l">
+              <a:lnSpc>
+                <a:spcPct val="115000"/>
+              </a:lnSpc>
+              <a:spcBef>
+                <a:spcPts val="2100"/>
+              </a:spcBef>
+              <a:spcAft>
+                <a:spcPts val="0"/>
+              </a:spcAft>
               <a:buNone/>
             </a:pPr>
             <a:r>
@@ -18014,11 +18448,38 @@
               </a:solidFill>
             </a:endParaRPr>
           </a:p>
+          <a:p>
+            <a:pPr indent="0" lvl="0" marL="0" rtl="0" algn="l">
+              <a:lnSpc>
+                <a:spcPct val="115000"/>
+              </a:lnSpc>
+              <a:spcBef>
+                <a:spcPts val="2100"/>
+              </a:spcBef>
+              <a:spcAft>
+                <a:spcPts val="1200"/>
+              </a:spcAft>
+              <a:buClr>
+                <a:schemeClr val="dk1"/>
+              </a:buClr>
+              <a:buSzPts val="1100"/>
+              <a:buFont typeface="Arial"/>
+              <a:buNone/>
+            </a:pPr>
+            <a:r>
+              <a:t/>
+            </a:r>
+            <a:endParaRPr sz="1500">
+              <a:solidFill>
+                <a:schemeClr val="lt1"/>
+              </a:solidFill>
+            </a:endParaRPr>
+          </a:p>
         </p:txBody>
       </p:sp>
       <p:sp>
         <p:nvSpPr>
-          <p:cNvPr id="198" name="Google Shape;198;p25"/>
+          <p:cNvPr id="199" name="Google Shape;199;p25"/>
           <p:cNvSpPr txBox="1"/>
           <p:nvPr/>
         </p:nvSpPr>
@@ -18102,7 +18563,7 @@
     </p:bg>
     <p:spTree>
       <p:nvGrpSpPr>
-        <p:cNvPr id="202" name="Shape 202"/>
+        <p:cNvPr id="203" name="Shape 203"/>
         <p:cNvGrpSpPr/>
         <p:nvPr/>
       </p:nvGrpSpPr>
@@ -18116,7 +18577,7 @@
       </p:grpSpPr>
       <p:sp>
         <p:nvSpPr>
-          <p:cNvPr id="203" name="Google Shape;203;p26"/>
+          <p:cNvPr id="204" name="Google Shape;204;p26"/>
           <p:cNvSpPr/>
           <p:nvPr/>
         </p:nvSpPr>
@@ -18188,7 +18649,7 @@
       </p:sp>
       <p:sp>
         <p:nvSpPr>
-          <p:cNvPr id="204" name="Google Shape;204;p26"/>
+          <p:cNvPr id="205" name="Google Shape;205;p26"/>
           <p:cNvSpPr txBox="1"/>
           <p:nvPr/>
         </p:nvSpPr>
@@ -18238,7 +18699,7 @@
                 <a:cs typeface="Georgia"/>
                 <a:sym typeface="Georgia"/>
               </a:rPr>
-              <a:t>Future Directions </a:t>
+              <a:t>Emerging Systems </a:t>
             </a:r>
             <a:endParaRPr b="0" i="0" sz="1400" u="none" cap="none" strike="noStrike">
               <a:solidFill>
@@ -18254,7 +18715,7 @@
       </p:sp>
       <p:sp>
         <p:nvSpPr>
-          <p:cNvPr id="205" name="Google Shape;205;p26"/>
+          <p:cNvPr id="206" name="Google Shape;206;p26"/>
           <p:cNvSpPr/>
           <p:nvPr/>
         </p:nvSpPr>
@@ -18326,7 +18787,7 @@
       </p:sp>
       <p:sp>
         <p:nvSpPr>
-          <p:cNvPr id="206" name="Google Shape;206;p26"/>
+          <p:cNvPr id="207" name="Google Shape;207;p26"/>
           <p:cNvSpPr txBox="1"/>
           <p:nvPr/>
         </p:nvSpPr>
@@ -18371,7 +18832,7 @@
                   <a:schemeClr val="lt1"/>
                 </a:solidFill>
               </a:rPr>
-              <a:t>Class balancing (weighted loss)</a:t>
+              <a:t>CNN + LSTM (temporal modeling)</a:t>
             </a:r>
             <a:endParaRPr sz="1200">
               <a:solidFill>
@@ -18402,7 +18863,7 @@
                   <a:schemeClr val="lt1"/>
                 </a:solidFill>
               </a:rPr>
-              <a:t>Focal Loss</a:t>
+              <a:t>Transformer-based vision models</a:t>
             </a:r>
             <a:endParaRPr sz="1200">
               <a:solidFill>
@@ -18433,7 +18894,7 @@
                   <a:schemeClr val="lt1"/>
                 </a:solidFill>
               </a:rPr>
-              <a:t>Temporal modeling (ResNet + LSTM)</a:t>
+              <a:t>Multimodal systems (video + audio + EEG)</a:t>
             </a:r>
             <a:endParaRPr sz="1200">
               <a:solidFill>
@@ -18464,7 +18925,7 @@
                   <a:schemeClr val="lt1"/>
                 </a:solidFill>
               </a:rPr>
-              <a:t>Domain adaptation techniques</a:t>
+              <a:t>Attention-based facial analysis</a:t>
             </a:r>
             <a:endParaRPr sz="1200">
               <a:solidFill>
@@ -18503,7 +18964,7 @@
       </p:sp>
       <p:sp>
         <p:nvSpPr>
-          <p:cNvPr id="207" name="Google Shape;207;p26"/>
+          <p:cNvPr id="208" name="Google Shape;208;p26"/>
           <p:cNvSpPr txBox="1"/>
           <p:nvPr/>
         </p:nvSpPr>
@@ -18587,7 +19048,7 @@
     </p:bg>
     <p:spTree>
       <p:nvGrpSpPr>
-        <p:cNvPr id="211" name="Shape 211"/>
+        <p:cNvPr id="212" name="Shape 212"/>
         <p:cNvGrpSpPr/>
         <p:nvPr/>
       </p:nvGrpSpPr>
@@ -18601,7 +19062,7 @@
       </p:grpSpPr>
       <p:sp>
         <p:nvSpPr>
-          <p:cNvPr id="212" name="Google Shape;212;p27"/>
+          <p:cNvPr id="213" name="Google Shape;213;p27"/>
           <p:cNvSpPr/>
           <p:nvPr/>
         </p:nvSpPr>
@@ -18673,7 +19134,7 @@
       </p:sp>
       <p:sp>
         <p:nvSpPr>
-          <p:cNvPr id="213" name="Google Shape;213;p27"/>
+          <p:cNvPr id="214" name="Google Shape;214;p27"/>
           <p:cNvSpPr txBox="1"/>
           <p:nvPr/>
         </p:nvSpPr>
@@ -18723,7 +19184,7 @@
                 <a:cs typeface="Georgia"/>
                 <a:sym typeface="Georgia"/>
               </a:rPr>
-              <a:t>Conclusion </a:t>
+              <a:t>Future Directions </a:t>
             </a:r>
             <a:endParaRPr b="0" i="0" sz="1400" u="none" cap="none" strike="noStrike">
               <a:solidFill>
@@ -18739,7 +19200,7 @@
       </p:sp>
       <p:sp>
         <p:nvSpPr>
-          <p:cNvPr id="214" name="Google Shape;214;p27"/>
+          <p:cNvPr id="215" name="Google Shape;215;p27"/>
           <p:cNvSpPr/>
           <p:nvPr/>
         </p:nvSpPr>
@@ -18811,14 +19272,14 @@
       </p:sp>
       <p:sp>
         <p:nvSpPr>
-          <p:cNvPr id="215" name="Google Shape;215;p27"/>
+          <p:cNvPr id="216" name="Google Shape;216;p27"/>
           <p:cNvSpPr txBox="1"/>
           <p:nvPr/>
         </p:nvSpPr>
         <p:spPr>
           <a:xfrm>
             <a:off x="822950" y="1799275"/>
-            <a:ext cx="10058400" cy="3815100"/>
+            <a:ext cx="10058400" cy="1280700"/>
           </a:xfrm>
           <a:prstGeom prst="rect">
             <a:avLst/>
@@ -18834,44 +19295,43 @@
           </a:bodyPr>
           <a:lstStyle/>
           <a:p>
-            <a:pPr indent="0" lvl="0" marL="0" rtl="0" algn="l">
+            <a:pPr indent="-304800" lvl="0" marL="457200" rtl="0" algn="l">
               <a:lnSpc>
                 <a:spcPct val="115000"/>
               </a:lnSpc>
               <a:spcBef>
-                <a:spcPts val="1800"/>
-              </a:spcBef>
-              <a:spcAft>
-                <a:spcPts val="0"/>
-              </a:spcAft>
-              <a:buClr>
-                <a:schemeClr val="dk1"/>
-              </a:buClr>
-              <a:buSzPts val="1100"/>
-              <a:buFont typeface="Arial"/>
-              <a:buNone/>
+                <a:spcPts val="1200"/>
+              </a:spcBef>
+              <a:spcAft>
+                <a:spcPts val="0"/>
+              </a:spcAft>
+              <a:buClr>
+                <a:schemeClr val="lt1"/>
+              </a:buClr>
+              <a:buSzPts val="1200"/>
+              <a:buChar char="●"/>
             </a:pPr>
             <a:r>
-              <a:rPr b="1" lang="en-US" sz="1700">
+              <a:rPr lang="en-US" sz="1200">
                 <a:solidFill>
                   <a:schemeClr val="lt1"/>
                 </a:solidFill>
               </a:rPr>
-              <a:t>What was achieved</a:t>
+              <a:t>Class balancing (weighted loss)</a:t>
             </a:r>
-            <a:endParaRPr b="1" sz="1700">
+            <a:endParaRPr sz="1200">
               <a:solidFill>
                 <a:schemeClr val="lt1"/>
               </a:solidFill>
             </a:endParaRPr>
           </a:p>
           <a:p>
-            <a:pPr indent="-298450" lvl="0" marL="457200" rtl="0" algn="l">
+            <a:pPr indent="-304800" lvl="0" marL="457200" rtl="0" algn="l">
               <a:lnSpc>
                 <a:spcPct val="115000"/>
               </a:lnSpc>
               <a:spcBef>
-                <a:spcPts val="1200"/>
+                <a:spcPts val="0"/>
               </a:spcBef>
               <a:spcAft>
                 <a:spcPts val="0"/>
@@ -18879,25 +19339,25 @@
               <a:buClr>
                 <a:schemeClr val="lt1"/>
               </a:buClr>
-              <a:buSzPts val="1100"/>
+              <a:buSzPts val="1200"/>
               <a:buChar char="●"/>
             </a:pPr>
             <a:r>
-              <a:rPr lang="en-US" sz="1100">
+              <a:rPr lang="en-US" sz="1200">
                 <a:solidFill>
                   <a:schemeClr val="lt1"/>
                 </a:solidFill>
               </a:rPr>
-              <a:t>End-to-end deep learning pipeline built</a:t>
+              <a:t>Focal Loss</a:t>
             </a:r>
-            <a:endParaRPr sz="1100">
+            <a:endParaRPr sz="1200">
               <a:solidFill>
                 <a:schemeClr val="lt1"/>
               </a:solidFill>
             </a:endParaRPr>
           </a:p>
           <a:p>
-            <a:pPr indent="-298450" lvl="0" marL="457200" rtl="0" algn="l">
+            <a:pPr indent="-304800" lvl="0" marL="457200" rtl="0" algn="l">
               <a:lnSpc>
                 <a:spcPct val="115000"/>
               </a:lnSpc>
@@ -18910,25 +19370,25 @@
               <a:buClr>
                 <a:schemeClr val="lt1"/>
               </a:buClr>
-              <a:buSzPts val="1100"/>
+              <a:buSzPts val="1200"/>
               <a:buChar char="●"/>
             </a:pPr>
             <a:r>
-              <a:rPr lang="en-US" sz="1100">
+              <a:rPr lang="en-US" sz="1200">
                 <a:solidFill>
                   <a:schemeClr val="lt1"/>
                 </a:solidFill>
               </a:rPr>
-              <a:t>ResNet18 applied to video emotion recognition</a:t>
+              <a:t>Temporal modeling (ResNet + LSTM)</a:t>
             </a:r>
-            <a:endParaRPr sz="1100">
+            <a:endParaRPr sz="1200">
               <a:solidFill>
                 <a:schemeClr val="lt1"/>
               </a:solidFill>
             </a:endParaRPr>
           </a:p>
           <a:p>
-            <a:pPr indent="-298450" lvl="0" marL="457200" rtl="0" algn="l">
+            <a:pPr indent="-304800" lvl="0" marL="457200" rtl="0" algn="l">
               <a:lnSpc>
                 <a:spcPct val="115000"/>
               </a:lnSpc>
@@ -18941,238 +19401,18 @@
               <a:buClr>
                 <a:schemeClr val="lt1"/>
               </a:buClr>
-              <a:buSzPts val="1100"/>
+              <a:buSzPts val="1200"/>
               <a:buChar char="●"/>
             </a:pPr>
             <a:r>
-              <a:rPr lang="en-US" sz="1100">
+              <a:rPr lang="en-US" sz="1200">
                 <a:solidFill>
                   <a:schemeClr val="lt1"/>
                 </a:solidFill>
               </a:rPr>
-              <a:t>Cross-dataset evaluation implemented</a:t>
+              <a:t>Domain adaptation techniques</a:t>
             </a:r>
-            <a:endParaRPr sz="1100">
-              <a:solidFill>
-                <a:schemeClr val="lt1"/>
-              </a:solidFill>
-            </a:endParaRPr>
-          </a:p>
-          <a:p>
-            <a:pPr indent="-298450" lvl="0" marL="457200" rtl="0" algn="l">
-              <a:lnSpc>
-                <a:spcPct val="115000"/>
-              </a:lnSpc>
-              <a:spcBef>
-                <a:spcPts val="0"/>
-              </a:spcBef>
-              <a:spcAft>
-                <a:spcPts val="0"/>
-              </a:spcAft>
-              <a:buClr>
-                <a:schemeClr val="lt1"/>
-              </a:buClr>
-              <a:buSzPts val="1100"/>
-              <a:buChar char="●"/>
-            </a:pPr>
-            <a:r>
-              <a:rPr lang="en-US" sz="1100">
-                <a:solidFill>
-                  <a:schemeClr val="lt1"/>
-                </a:solidFill>
-              </a:rPr>
-              <a:t>Model limitations identified</a:t>
-            </a:r>
-            <a:endParaRPr sz="1100">
-              <a:solidFill>
-                <a:schemeClr val="lt1"/>
-              </a:solidFill>
-            </a:endParaRPr>
-          </a:p>
-          <a:p>
-            <a:pPr indent="0" lvl="0" marL="0" rtl="0" algn="l">
-              <a:lnSpc>
-                <a:spcPct val="115000"/>
-              </a:lnSpc>
-              <a:spcBef>
-                <a:spcPts val="1800"/>
-              </a:spcBef>
-              <a:spcAft>
-                <a:spcPts val="0"/>
-              </a:spcAft>
-              <a:buClr>
-                <a:schemeClr val="dk1"/>
-              </a:buClr>
-              <a:buSzPts val="1100"/>
-              <a:buFont typeface="Arial"/>
-              <a:buNone/>
-            </a:pPr>
-            <a:r>
-              <a:rPr b="1" lang="en-US" sz="1700">
-                <a:solidFill>
-                  <a:schemeClr val="lt1"/>
-                </a:solidFill>
-              </a:rPr>
-              <a:t>Open Problems</a:t>
-            </a:r>
-            <a:endParaRPr b="1" sz="1700">
-              <a:solidFill>
-                <a:schemeClr val="lt1"/>
-              </a:solidFill>
-            </a:endParaRPr>
-          </a:p>
-          <a:p>
-            <a:pPr indent="-298450" lvl="0" marL="457200" rtl="0" algn="l">
-              <a:lnSpc>
-                <a:spcPct val="115000"/>
-              </a:lnSpc>
-              <a:spcBef>
-                <a:spcPts val="1200"/>
-              </a:spcBef>
-              <a:spcAft>
-                <a:spcPts val="0"/>
-              </a:spcAft>
-              <a:buClr>
-                <a:schemeClr val="lt1"/>
-              </a:buClr>
-              <a:buSzPts val="1100"/>
-              <a:buChar char="●"/>
-            </a:pPr>
-            <a:r>
-              <a:rPr lang="en-US" sz="1100">
-                <a:solidFill>
-                  <a:schemeClr val="lt1"/>
-                </a:solidFill>
-              </a:rPr>
-              <a:t>Dataset imbalance</a:t>
-            </a:r>
-            <a:endParaRPr sz="1100">
-              <a:solidFill>
-                <a:schemeClr val="lt1"/>
-              </a:solidFill>
-            </a:endParaRPr>
-          </a:p>
-          <a:p>
-            <a:pPr indent="-298450" lvl="0" marL="457200" rtl="0" algn="l">
-              <a:lnSpc>
-                <a:spcPct val="115000"/>
-              </a:lnSpc>
-              <a:spcBef>
-                <a:spcPts val="0"/>
-              </a:spcBef>
-              <a:spcAft>
-                <a:spcPts val="0"/>
-              </a:spcAft>
-              <a:buClr>
-                <a:schemeClr val="lt1"/>
-              </a:buClr>
-              <a:buSzPts val="1100"/>
-              <a:buChar char="●"/>
-            </a:pPr>
-            <a:r>
-              <a:rPr lang="en-US" sz="1100">
-                <a:solidFill>
-                  <a:schemeClr val="lt1"/>
-                </a:solidFill>
-              </a:rPr>
-              <a:t>Domain shift between datasets</a:t>
-            </a:r>
-            <a:endParaRPr sz="1100">
-              <a:solidFill>
-                <a:schemeClr val="lt1"/>
-              </a:solidFill>
-            </a:endParaRPr>
-          </a:p>
-          <a:p>
-            <a:pPr indent="-298450" lvl="0" marL="457200" rtl="0" algn="l">
-              <a:lnSpc>
-                <a:spcPct val="115000"/>
-              </a:lnSpc>
-              <a:spcBef>
-                <a:spcPts val="0"/>
-              </a:spcBef>
-              <a:spcAft>
-                <a:spcPts val="0"/>
-              </a:spcAft>
-              <a:buClr>
-                <a:schemeClr val="lt1"/>
-              </a:buClr>
-              <a:buSzPts val="1100"/>
-              <a:buChar char="●"/>
-            </a:pPr>
-            <a:r>
-              <a:rPr lang="en-US" sz="1100">
-                <a:solidFill>
-                  <a:schemeClr val="lt1"/>
-                </a:solidFill>
-              </a:rPr>
-              <a:t>Lack of temporal modeling</a:t>
-            </a:r>
-            <a:endParaRPr sz="1100">
-              <a:solidFill>
-                <a:schemeClr val="lt1"/>
-              </a:solidFill>
-            </a:endParaRPr>
-          </a:p>
-          <a:p>
-            <a:pPr indent="0" lvl="0" marL="0" rtl="0" algn="l">
-              <a:lnSpc>
-                <a:spcPct val="115000"/>
-              </a:lnSpc>
-              <a:spcBef>
-                <a:spcPts val="1800"/>
-              </a:spcBef>
-              <a:spcAft>
-                <a:spcPts val="0"/>
-              </a:spcAft>
-              <a:buClr>
-                <a:schemeClr val="dk1"/>
-              </a:buClr>
-              <a:buSzPts val="1100"/>
-              <a:buFont typeface="Arial"/>
-              <a:buNone/>
-            </a:pPr>
-            <a:r>
-              <a:rPr b="1" lang="en-US" sz="1700">
-                <a:solidFill>
-                  <a:schemeClr val="lt1"/>
-                </a:solidFill>
-              </a:rPr>
-              <a:t>Final Insight</a:t>
-            </a:r>
-            <a:endParaRPr b="1" sz="1700">
-              <a:solidFill>
-                <a:schemeClr val="lt1"/>
-              </a:solidFill>
-            </a:endParaRPr>
-          </a:p>
-          <a:p>
-            <a:pPr indent="0" lvl="0" marL="381000" marR="381000" rtl="0" algn="l">
-              <a:lnSpc>
-                <a:spcPct val="115000"/>
-              </a:lnSpc>
-              <a:spcBef>
-                <a:spcPts val="1200"/>
-              </a:spcBef>
-              <a:spcAft>
-                <a:spcPts val="0"/>
-              </a:spcAft>
-              <a:buClr>
-                <a:schemeClr val="dk1"/>
-              </a:buClr>
-              <a:buSzPts val="1100"/>
-              <a:buFont typeface="Arial"/>
-              <a:buNone/>
-            </a:pPr>
-            <a:r>
-              <a:rPr lang="en-US" sz="1100">
-                <a:solidFill>
-                  <a:schemeClr val="lt1"/>
-                </a:solidFill>
-              </a:rPr>
-              <a:t>Deep learning works well, but real-world emotion recognition still requires better generalization and temporal understanding.</a:t>
-            </a:r>
-            <a:endParaRPr sz="1100">
+            <a:endParaRPr sz="1200">
               <a:solidFill>
                 <a:schemeClr val="lt1"/>
               </a:solidFill>
@@ -19209,7 +19449,7 @@
       </p:sp>
       <p:sp>
         <p:nvSpPr>
-          <p:cNvPr id="216" name="Google Shape;216;p27"/>
+          <p:cNvPr id="217" name="Google Shape;217;p27"/>
           <p:cNvSpPr txBox="1"/>
           <p:nvPr/>
         </p:nvSpPr>
@@ -19293,7 +19533,7 @@
     </p:bg>
     <p:spTree>
       <p:nvGrpSpPr>
-        <p:cNvPr id="220" name="Shape 220"/>
+        <p:cNvPr id="221" name="Shape 221"/>
         <p:cNvGrpSpPr/>
         <p:nvPr/>
       </p:nvGrpSpPr>
@@ -19307,7 +19547,7 @@
       </p:grpSpPr>
       <p:sp>
         <p:nvSpPr>
-          <p:cNvPr id="221" name="Google Shape;221;p28"/>
+          <p:cNvPr id="222" name="Google Shape;222;p28"/>
           <p:cNvSpPr/>
           <p:nvPr/>
         </p:nvSpPr>
@@ -19379,7 +19619,7 @@
       </p:sp>
       <p:sp>
         <p:nvSpPr>
-          <p:cNvPr id="222" name="Google Shape;222;p28"/>
+          <p:cNvPr id="223" name="Google Shape;223;p28"/>
           <p:cNvSpPr txBox="1"/>
           <p:nvPr/>
         </p:nvSpPr>
@@ -19445,7 +19685,7 @@
       </p:sp>
       <p:sp>
         <p:nvSpPr>
-          <p:cNvPr id="223" name="Google Shape;223;p28"/>
+          <p:cNvPr id="224" name="Google Shape;224;p28"/>
           <p:cNvSpPr/>
           <p:nvPr/>
         </p:nvSpPr>
@@ -19517,7 +19757,713 @@
       </p:sp>
       <p:sp>
         <p:nvSpPr>
-          <p:cNvPr id="224" name="Google Shape;224;p28"/>
+          <p:cNvPr id="225" name="Google Shape;225;p28"/>
+          <p:cNvSpPr txBox="1"/>
+          <p:nvPr/>
+        </p:nvSpPr>
+        <p:spPr>
+          <a:xfrm>
+            <a:off x="822950" y="1799275"/>
+            <a:ext cx="10058400" cy="3815100"/>
+          </a:xfrm>
+          <a:prstGeom prst="rect">
+            <a:avLst/>
+          </a:prstGeom>
+          <a:noFill/>
+          <a:ln>
+            <a:noFill/>
+          </a:ln>
+        </p:spPr>
+        <p:txBody>
+          <a:bodyPr anchorCtr="0" anchor="t" bIns="45700" lIns="91425" spcFirstLastPara="1" rIns="91425" wrap="square" tIns="45700">
+            <a:spAutoFit/>
+          </a:bodyPr>
+          <a:lstStyle/>
+          <a:p>
+            <a:pPr indent="0" lvl="0" marL="0" rtl="0" algn="l">
+              <a:lnSpc>
+                <a:spcPct val="115000"/>
+              </a:lnSpc>
+              <a:spcBef>
+                <a:spcPts val="1800"/>
+              </a:spcBef>
+              <a:spcAft>
+                <a:spcPts val="0"/>
+              </a:spcAft>
+              <a:buClr>
+                <a:schemeClr val="dk1"/>
+              </a:buClr>
+              <a:buSzPts val="1100"/>
+              <a:buFont typeface="Arial"/>
+              <a:buNone/>
+            </a:pPr>
+            <a:r>
+              <a:rPr b="1" lang="en-US" sz="1700">
+                <a:solidFill>
+                  <a:schemeClr val="lt1"/>
+                </a:solidFill>
+              </a:rPr>
+              <a:t>What was achieved</a:t>
+            </a:r>
+            <a:endParaRPr b="1" sz="1700">
+              <a:solidFill>
+                <a:schemeClr val="lt1"/>
+              </a:solidFill>
+            </a:endParaRPr>
+          </a:p>
+          <a:p>
+            <a:pPr indent="-298450" lvl="0" marL="457200" rtl="0" algn="l">
+              <a:lnSpc>
+                <a:spcPct val="115000"/>
+              </a:lnSpc>
+              <a:spcBef>
+                <a:spcPts val="1200"/>
+              </a:spcBef>
+              <a:spcAft>
+                <a:spcPts val="0"/>
+              </a:spcAft>
+              <a:buClr>
+                <a:schemeClr val="lt1"/>
+              </a:buClr>
+              <a:buSzPts val="1100"/>
+              <a:buChar char="●"/>
+            </a:pPr>
+            <a:r>
+              <a:rPr lang="en-US" sz="1100">
+                <a:solidFill>
+                  <a:schemeClr val="lt1"/>
+                </a:solidFill>
+              </a:rPr>
+              <a:t>End-to-end deep learning pipeline built</a:t>
+            </a:r>
+            <a:endParaRPr sz="1100">
+              <a:solidFill>
+                <a:schemeClr val="lt1"/>
+              </a:solidFill>
+            </a:endParaRPr>
+          </a:p>
+          <a:p>
+            <a:pPr indent="-298450" lvl="0" marL="457200" rtl="0" algn="l">
+              <a:lnSpc>
+                <a:spcPct val="115000"/>
+              </a:lnSpc>
+              <a:spcBef>
+                <a:spcPts val="0"/>
+              </a:spcBef>
+              <a:spcAft>
+                <a:spcPts val="0"/>
+              </a:spcAft>
+              <a:buClr>
+                <a:schemeClr val="lt1"/>
+              </a:buClr>
+              <a:buSzPts val="1100"/>
+              <a:buChar char="●"/>
+            </a:pPr>
+            <a:r>
+              <a:rPr lang="en-US" sz="1100">
+                <a:solidFill>
+                  <a:schemeClr val="lt1"/>
+                </a:solidFill>
+              </a:rPr>
+              <a:t>ResNet18 applied to video emotion recognition</a:t>
+            </a:r>
+            <a:endParaRPr sz="1100">
+              <a:solidFill>
+                <a:schemeClr val="lt1"/>
+              </a:solidFill>
+            </a:endParaRPr>
+          </a:p>
+          <a:p>
+            <a:pPr indent="-298450" lvl="0" marL="457200" rtl="0" algn="l">
+              <a:lnSpc>
+                <a:spcPct val="115000"/>
+              </a:lnSpc>
+              <a:spcBef>
+                <a:spcPts val="0"/>
+              </a:spcBef>
+              <a:spcAft>
+                <a:spcPts val="0"/>
+              </a:spcAft>
+              <a:buClr>
+                <a:schemeClr val="lt1"/>
+              </a:buClr>
+              <a:buSzPts val="1100"/>
+              <a:buChar char="●"/>
+            </a:pPr>
+            <a:r>
+              <a:rPr lang="en-US" sz="1100">
+                <a:solidFill>
+                  <a:schemeClr val="lt1"/>
+                </a:solidFill>
+              </a:rPr>
+              <a:t>Cross-dataset evaluation implemented</a:t>
+            </a:r>
+            <a:endParaRPr sz="1100">
+              <a:solidFill>
+                <a:schemeClr val="lt1"/>
+              </a:solidFill>
+            </a:endParaRPr>
+          </a:p>
+          <a:p>
+            <a:pPr indent="-298450" lvl="0" marL="457200" rtl="0" algn="l">
+              <a:lnSpc>
+                <a:spcPct val="115000"/>
+              </a:lnSpc>
+              <a:spcBef>
+                <a:spcPts val="0"/>
+              </a:spcBef>
+              <a:spcAft>
+                <a:spcPts val="0"/>
+              </a:spcAft>
+              <a:buClr>
+                <a:schemeClr val="lt1"/>
+              </a:buClr>
+              <a:buSzPts val="1100"/>
+              <a:buChar char="●"/>
+            </a:pPr>
+            <a:r>
+              <a:rPr lang="en-US" sz="1100">
+                <a:solidFill>
+                  <a:schemeClr val="lt1"/>
+                </a:solidFill>
+              </a:rPr>
+              <a:t>Model limitations identified</a:t>
+            </a:r>
+            <a:endParaRPr sz="1100">
+              <a:solidFill>
+                <a:schemeClr val="lt1"/>
+              </a:solidFill>
+            </a:endParaRPr>
+          </a:p>
+          <a:p>
+            <a:pPr indent="0" lvl="0" marL="0" rtl="0" algn="l">
+              <a:lnSpc>
+                <a:spcPct val="115000"/>
+              </a:lnSpc>
+              <a:spcBef>
+                <a:spcPts val="1800"/>
+              </a:spcBef>
+              <a:spcAft>
+                <a:spcPts val="0"/>
+              </a:spcAft>
+              <a:buClr>
+                <a:schemeClr val="dk1"/>
+              </a:buClr>
+              <a:buSzPts val="1100"/>
+              <a:buFont typeface="Arial"/>
+              <a:buNone/>
+            </a:pPr>
+            <a:r>
+              <a:rPr b="1" lang="en-US" sz="1700">
+                <a:solidFill>
+                  <a:schemeClr val="lt1"/>
+                </a:solidFill>
+              </a:rPr>
+              <a:t>Open Problems</a:t>
+            </a:r>
+            <a:endParaRPr b="1" sz="1700">
+              <a:solidFill>
+                <a:schemeClr val="lt1"/>
+              </a:solidFill>
+            </a:endParaRPr>
+          </a:p>
+          <a:p>
+            <a:pPr indent="-298450" lvl="0" marL="457200" rtl="0" algn="l">
+              <a:lnSpc>
+                <a:spcPct val="115000"/>
+              </a:lnSpc>
+              <a:spcBef>
+                <a:spcPts val="1200"/>
+              </a:spcBef>
+              <a:spcAft>
+                <a:spcPts val="0"/>
+              </a:spcAft>
+              <a:buClr>
+                <a:schemeClr val="lt1"/>
+              </a:buClr>
+              <a:buSzPts val="1100"/>
+              <a:buChar char="●"/>
+            </a:pPr>
+            <a:r>
+              <a:rPr lang="en-US" sz="1100">
+                <a:solidFill>
+                  <a:schemeClr val="lt1"/>
+                </a:solidFill>
+              </a:rPr>
+              <a:t>Dataset imbalance</a:t>
+            </a:r>
+            <a:endParaRPr sz="1100">
+              <a:solidFill>
+                <a:schemeClr val="lt1"/>
+              </a:solidFill>
+            </a:endParaRPr>
+          </a:p>
+          <a:p>
+            <a:pPr indent="-298450" lvl="0" marL="457200" rtl="0" algn="l">
+              <a:lnSpc>
+                <a:spcPct val="115000"/>
+              </a:lnSpc>
+              <a:spcBef>
+                <a:spcPts val="0"/>
+              </a:spcBef>
+              <a:spcAft>
+                <a:spcPts val="0"/>
+              </a:spcAft>
+              <a:buClr>
+                <a:schemeClr val="lt1"/>
+              </a:buClr>
+              <a:buSzPts val="1100"/>
+              <a:buChar char="●"/>
+            </a:pPr>
+            <a:r>
+              <a:rPr lang="en-US" sz="1100">
+                <a:solidFill>
+                  <a:schemeClr val="lt1"/>
+                </a:solidFill>
+              </a:rPr>
+              <a:t>Domain shift between datasets</a:t>
+            </a:r>
+            <a:endParaRPr sz="1100">
+              <a:solidFill>
+                <a:schemeClr val="lt1"/>
+              </a:solidFill>
+            </a:endParaRPr>
+          </a:p>
+          <a:p>
+            <a:pPr indent="-298450" lvl="0" marL="457200" rtl="0" algn="l">
+              <a:lnSpc>
+                <a:spcPct val="115000"/>
+              </a:lnSpc>
+              <a:spcBef>
+                <a:spcPts val="0"/>
+              </a:spcBef>
+              <a:spcAft>
+                <a:spcPts val="0"/>
+              </a:spcAft>
+              <a:buClr>
+                <a:schemeClr val="lt1"/>
+              </a:buClr>
+              <a:buSzPts val="1100"/>
+              <a:buChar char="●"/>
+            </a:pPr>
+            <a:r>
+              <a:rPr lang="en-US" sz="1100">
+                <a:solidFill>
+                  <a:schemeClr val="lt1"/>
+                </a:solidFill>
+              </a:rPr>
+              <a:t>Lack of temporal modeling</a:t>
+            </a:r>
+            <a:endParaRPr sz="1100">
+              <a:solidFill>
+                <a:schemeClr val="lt1"/>
+              </a:solidFill>
+            </a:endParaRPr>
+          </a:p>
+          <a:p>
+            <a:pPr indent="0" lvl="0" marL="0" rtl="0" algn="l">
+              <a:lnSpc>
+                <a:spcPct val="115000"/>
+              </a:lnSpc>
+              <a:spcBef>
+                <a:spcPts val="1800"/>
+              </a:spcBef>
+              <a:spcAft>
+                <a:spcPts val="0"/>
+              </a:spcAft>
+              <a:buClr>
+                <a:schemeClr val="dk1"/>
+              </a:buClr>
+              <a:buSzPts val="1100"/>
+              <a:buFont typeface="Arial"/>
+              <a:buNone/>
+            </a:pPr>
+            <a:r>
+              <a:rPr b="1" lang="en-US" sz="1700">
+                <a:solidFill>
+                  <a:schemeClr val="lt1"/>
+                </a:solidFill>
+              </a:rPr>
+              <a:t>Final Insight</a:t>
+            </a:r>
+            <a:endParaRPr b="1" sz="1700">
+              <a:solidFill>
+                <a:schemeClr val="lt1"/>
+              </a:solidFill>
+            </a:endParaRPr>
+          </a:p>
+          <a:p>
+            <a:pPr indent="0" lvl="0" marL="381000" marR="381000" rtl="0" algn="l">
+              <a:lnSpc>
+                <a:spcPct val="115000"/>
+              </a:lnSpc>
+              <a:spcBef>
+                <a:spcPts val="1200"/>
+              </a:spcBef>
+              <a:spcAft>
+                <a:spcPts val="0"/>
+              </a:spcAft>
+              <a:buClr>
+                <a:schemeClr val="dk1"/>
+              </a:buClr>
+              <a:buSzPts val="1100"/>
+              <a:buFont typeface="Arial"/>
+              <a:buNone/>
+            </a:pPr>
+            <a:r>
+              <a:rPr lang="en-US" sz="1100">
+                <a:solidFill>
+                  <a:schemeClr val="lt1"/>
+                </a:solidFill>
+              </a:rPr>
+              <a:t>Deep learning works well, but real-world emotion recognition still requires better generalization and temporal understanding.</a:t>
+            </a:r>
+            <a:endParaRPr sz="1100">
+              <a:solidFill>
+                <a:schemeClr val="lt1"/>
+              </a:solidFill>
+            </a:endParaRPr>
+          </a:p>
+          <a:p>
+            <a:pPr indent="0" lvl="0" marL="0" rtl="0" algn="l">
+              <a:lnSpc>
+                <a:spcPct val="115000"/>
+              </a:lnSpc>
+              <a:spcBef>
+                <a:spcPts val="1200"/>
+              </a:spcBef>
+              <a:spcAft>
+                <a:spcPts val="1200"/>
+              </a:spcAft>
+              <a:buClr>
+                <a:schemeClr val="dk1"/>
+              </a:buClr>
+              <a:buSzPts val="1100"/>
+              <a:buFont typeface="Arial"/>
+              <a:buNone/>
+            </a:pPr>
+            <a:r>
+              <a:t/>
+            </a:r>
+            <a:endParaRPr sz="1200">
+              <a:solidFill>
+                <a:schemeClr val="lt1"/>
+              </a:solidFill>
+            </a:endParaRPr>
+          </a:p>
+        </p:txBody>
+      </p:sp>
+      <p:sp>
+        <p:nvSpPr>
+          <p:cNvPr id="226" name="Google Shape;226;p28"/>
+          <p:cNvSpPr txBox="1"/>
+          <p:nvPr/>
+        </p:nvSpPr>
+        <p:spPr>
+          <a:xfrm>
+            <a:off x="9601200" y="6217920"/>
+            <a:ext cx="1828800" cy="276900"/>
+          </a:xfrm>
+          <a:prstGeom prst="rect">
+            <a:avLst/>
+          </a:prstGeom>
+          <a:noFill/>
+          <a:ln>
+            <a:noFill/>
+          </a:ln>
+        </p:spPr>
+        <p:txBody>
+          <a:bodyPr anchorCtr="0" anchor="t" bIns="45700" lIns="91425" spcFirstLastPara="1" rIns="91425" wrap="square" tIns="45700">
+            <a:spAutoFit/>
+          </a:bodyPr>
+          <a:lstStyle/>
+          <a:p>
+            <a:pPr indent="0" lvl="0" marL="0" marR="0" rtl="0" algn="l">
+              <a:lnSpc>
+                <a:spcPct val="100000"/>
+              </a:lnSpc>
+              <a:spcBef>
+                <a:spcPts val="0"/>
+              </a:spcBef>
+              <a:spcAft>
+                <a:spcPts val="0"/>
+              </a:spcAft>
+              <a:buClr>
+                <a:srgbClr val="000000"/>
+              </a:buClr>
+              <a:buSzPts val="1200"/>
+              <a:buFont typeface="Arial"/>
+              <a:buNone/>
+            </a:pPr>
+            <a:r>
+              <a:rPr b="0" i="0" lang="en-US" sz="1200" u="none" cap="none" strike="noStrike">
+                <a:solidFill>
+                  <a:srgbClr val="D2D2D2"/>
+                </a:solidFill>
+                <a:latin typeface="Georgia"/>
+                <a:ea typeface="Georgia"/>
+                <a:cs typeface="Georgia"/>
+                <a:sym typeface="Georgia"/>
+              </a:rPr>
+              <a:t>3</a:t>
+            </a:r>
+            <a:endParaRPr b="0" i="0" sz="1400" u="none" cap="none" strike="noStrike">
+              <a:solidFill>
+                <a:srgbClr val="000000"/>
+              </a:solidFill>
+              <a:latin typeface="Arial"/>
+              <a:ea typeface="Arial"/>
+              <a:cs typeface="Arial"/>
+              <a:sym typeface="Arial"/>
+            </a:endParaRPr>
+          </a:p>
+        </p:txBody>
+      </p:sp>
+    </p:spTree>
+  </p:cSld>
+  <p:clrMapOvr>
+    <a:masterClrMapping/>
+  </p:clrMapOvr>
+</p:sld>
+</file>
+
+<file path=ppt/slides/slide17.xml><?xml version="1.0" encoding="utf-8"?>
+<p:sld xmlns:a="http://schemas.openxmlformats.org/drawingml/2006/main" xmlns:r="http://schemas.openxmlformats.org/officeDocument/2006/relationships" xmlns:mc="http://schemas.openxmlformats.org/markup-compatibility/2006" xmlns:mv="urn:schemas-microsoft-com:mac:vml" xmlns:p="http://schemas.openxmlformats.org/presentationml/2006/main" xmlns:c="http://schemas.openxmlformats.org/drawingml/2006/chart" xmlns:dgm="http://schemas.openxmlformats.org/drawingml/2006/diagram" xmlns:o="urn:schemas-microsoft-com:office:office" xmlns:v="urn:schemas-microsoft-com:vml" xmlns:pvml="urn:schemas-microsoft-com:office:powerpoint" xmlns:com="http://schemas.openxmlformats.org/drawingml/2006/compatibility" xmlns:p14="http://schemas.microsoft.com/office/powerpoint/2010/main" xmlns:p15="http://schemas.microsoft.com/office/powerpoint/2012/main" xmlns:ahyp="http://schemas.microsoft.com/office/drawing/2018/hyperlinkcolor">
+  <p:cSld>
+    <p:bg>
+      <p:bgPr>
+        <a:solidFill>
+          <a:srgbClr val="000000"/>
+        </a:solidFill>
+      </p:bgPr>
+    </p:bg>
+    <p:spTree>
+      <p:nvGrpSpPr>
+        <p:cNvPr id="230" name="Shape 230"/>
+        <p:cNvGrpSpPr/>
+        <p:nvPr/>
+      </p:nvGrpSpPr>
+      <p:grpSpPr>
+        <a:xfrm>
+          <a:off x="0" y="0"/>
+          <a:ext cx="0" cy="0"/>
+          <a:chOff x="0" y="0"/>
+          <a:chExt cx="0" cy="0"/>
+        </a:xfrm>
+      </p:grpSpPr>
+      <p:sp>
+        <p:nvSpPr>
+          <p:cNvPr id="231" name="Google Shape;231;p29"/>
+          <p:cNvSpPr/>
+          <p:nvPr/>
+        </p:nvSpPr>
+        <p:spPr>
+          <a:xfrm>
+            <a:off x="0" y="0"/>
+            <a:ext cx="9144000" cy="498300"/>
+          </a:xfrm>
+          <a:prstGeom prst="rect">
+            <a:avLst/>
+          </a:prstGeom>
+          <a:solidFill>
+            <a:srgbClr val="32A8A0"/>
+          </a:solidFill>
+          <a:ln cap="flat" cmpd="sng" w="9525">
+            <a:solidFill>
+              <a:srgbClr val="32A8A0"/>
+            </a:solidFill>
+            <a:prstDash val="solid"/>
+            <a:round/>
+            <a:headEnd len="sm" w="sm" type="none"/>
+            <a:tailEnd len="sm" w="sm" type="none"/>
+          </a:ln>
+          <a:effectLst>
+            <a:outerShdw blurRad="40000" rotWithShape="0" dir="5400000" dist="23000">
+              <a:srgbClr val="000000">
+                <a:alpha val="34900"/>
+              </a:srgbClr>
+            </a:outerShdw>
+          </a:effectLst>
+        </p:spPr>
+        <p:txBody>
+          <a:bodyPr anchorCtr="0" anchor="ctr" bIns="45700" lIns="91425" spcFirstLastPara="1" rIns="91425" wrap="square" tIns="45700">
+            <a:noAutofit/>
+          </a:bodyPr>
+          <a:lstStyle/>
+          <a:p>
+            <a:pPr indent="0" lvl="0" marL="0" marR="0" rtl="0" algn="ctr">
+              <a:lnSpc>
+                <a:spcPct val="100000"/>
+              </a:lnSpc>
+              <a:spcBef>
+                <a:spcPts val="0"/>
+              </a:spcBef>
+              <a:spcAft>
+                <a:spcPts val="0"/>
+              </a:spcAft>
+              <a:buClr>
+                <a:srgbClr val="000000"/>
+              </a:buClr>
+              <a:buSzPts val="1800"/>
+              <a:buFont typeface="Arial"/>
+              <a:buNone/>
+            </a:pPr>
+            <a:r>
+              <a:t/>
+            </a:r>
+            <a:endParaRPr b="0" i="0" sz="1800" u="none" cap="none" strike="noStrike">
+              <a:solidFill>
+                <a:schemeClr val="dk1"/>
+              </a:solidFill>
+              <a:latin typeface="Calibri"/>
+              <a:ea typeface="Calibri"/>
+              <a:cs typeface="Calibri"/>
+              <a:sym typeface="Calibri"/>
+            </a:endParaRPr>
+          </a:p>
+        </p:txBody>
+      </p:sp>
+      <p:sp>
+        <p:nvSpPr>
+          <p:cNvPr id="232" name="Google Shape;232;p29"/>
+          <p:cNvSpPr txBox="1"/>
+          <p:nvPr/>
+        </p:nvSpPr>
+        <p:spPr>
+          <a:xfrm>
+            <a:off x="822960" y="510363"/>
+            <a:ext cx="9601200" cy="615600"/>
+          </a:xfrm>
+          <a:prstGeom prst="rect">
+            <a:avLst/>
+          </a:prstGeom>
+          <a:noFill/>
+          <a:ln>
+            <a:noFill/>
+          </a:ln>
+        </p:spPr>
+        <p:txBody>
+          <a:bodyPr anchorCtr="0" anchor="t" bIns="45700" lIns="91425" spcFirstLastPara="1" rIns="91425" wrap="square" tIns="45700">
+            <a:spAutoFit/>
+          </a:bodyPr>
+          <a:lstStyle/>
+          <a:p>
+            <a:pPr indent="0" lvl="0" marL="0" marR="0" rtl="0" algn="l">
+              <a:lnSpc>
+                <a:spcPct val="100000"/>
+              </a:lnSpc>
+              <a:spcBef>
+                <a:spcPts val="0"/>
+              </a:spcBef>
+              <a:spcAft>
+                <a:spcPts val="0"/>
+              </a:spcAft>
+              <a:buClr>
+                <a:srgbClr val="000000"/>
+              </a:buClr>
+              <a:buSzPts val="3400"/>
+              <a:buFont typeface="Arial"/>
+              <a:buNone/>
+            </a:pPr>
+            <a:r>
+              <a:rPr lang="en-US" sz="3400">
+                <a:solidFill>
+                  <a:srgbClr val="FFFFFF"/>
+                </a:solidFill>
+                <a:latin typeface="Georgia"/>
+                <a:ea typeface="Georgia"/>
+                <a:cs typeface="Georgia"/>
+                <a:sym typeface="Georgia"/>
+              </a:rPr>
+              <a:t>Conclusion </a:t>
+            </a:r>
+            <a:endParaRPr b="0" i="0" sz="1400" u="none" cap="none" strike="noStrike">
+              <a:solidFill>
+                <a:srgbClr val="000000"/>
+              </a:solidFill>
+              <a:latin typeface="Arial"/>
+              <a:ea typeface="Arial"/>
+              <a:cs typeface="Arial"/>
+              <a:sym typeface="Arial"/>
+            </a:endParaRPr>
+          </a:p>
+        </p:txBody>
+      </p:sp>
+      <p:sp>
+        <p:nvSpPr>
+          <p:cNvPr id="233" name="Google Shape;233;p29"/>
+          <p:cNvSpPr/>
+          <p:nvPr/>
+        </p:nvSpPr>
+        <p:spPr>
+          <a:xfrm>
+            <a:off x="822960" y="1424763"/>
+            <a:ext cx="457200" cy="27300"/>
+          </a:xfrm>
+          <a:prstGeom prst="rect">
+            <a:avLst/>
+          </a:prstGeom>
+          <a:solidFill>
+            <a:srgbClr val="FFFFFF"/>
+          </a:solidFill>
+          <a:ln cap="flat" cmpd="sng" w="9525">
+            <a:solidFill>
+              <a:srgbClr val="FFFFFF"/>
+            </a:solidFill>
+            <a:prstDash val="solid"/>
+            <a:round/>
+            <a:headEnd len="sm" w="sm" type="none"/>
+            <a:tailEnd len="sm" w="sm" type="none"/>
+          </a:ln>
+          <a:effectLst>
+            <a:outerShdw blurRad="40000" rotWithShape="0" dir="5400000" dist="23000">
+              <a:srgbClr val="000000">
+                <a:alpha val="34900"/>
+              </a:srgbClr>
+            </a:outerShdw>
+          </a:effectLst>
+        </p:spPr>
+        <p:txBody>
+          <a:bodyPr anchorCtr="0" anchor="ctr" bIns="45700" lIns="91425" spcFirstLastPara="1" rIns="91425" wrap="square" tIns="45700">
+            <a:noAutofit/>
+          </a:bodyPr>
+          <a:lstStyle/>
+          <a:p>
+            <a:pPr indent="0" lvl="0" marL="0" marR="0" rtl="0" algn="ctr">
+              <a:lnSpc>
+                <a:spcPct val="100000"/>
+              </a:lnSpc>
+              <a:spcBef>
+                <a:spcPts val="0"/>
+              </a:spcBef>
+              <a:spcAft>
+                <a:spcPts val="0"/>
+              </a:spcAft>
+              <a:buClr>
+                <a:srgbClr val="000000"/>
+              </a:buClr>
+              <a:buSzPts val="1800"/>
+              <a:buFont typeface="Arial"/>
+              <a:buNone/>
+            </a:pPr>
+            <a:r>
+              <a:t/>
+            </a:r>
+            <a:endParaRPr b="0" i="0" sz="1800" u="none" cap="none" strike="noStrike">
+              <a:solidFill>
+                <a:schemeClr val="dk1"/>
+              </a:solidFill>
+              <a:latin typeface="Calibri"/>
+              <a:ea typeface="Calibri"/>
+              <a:cs typeface="Calibri"/>
+              <a:sym typeface="Calibri"/>
+            </a:endParaRPr>
+          </a:p>
+        </p:txBody>
+      </p:sp>
+      <p:sp>
+        <p:nvSpPr>
+          <p:cNvPr id="234" name="Google Shape;234;p29"/>
           <p:cNvSpPr txBox="1"/>
           <p:nvPr/>
         </p:nvSpPr>
@@ -19575,7 +20521,7 @@
       </p:sp>
       <p:sp>
         <p:nvSpPr>
-          <p:cNvPr id="225" name="Google Shape;225;p28"/>
+          <p:cNvPr id="235" name="Google Shape;235;p29"/>
           <p:cNvSpPr txBox="1"/>
           <p:nvPr/>
         </p:nvSpPr>
@@ -22524,7 +23470,7 @@
         <p:spPr>
           <a:xfrm>
             <a:off x="0" y="0"/>
-            <a:ext cx="9144000" cy="318900"/>
+            <a:ext cx="9144000" cy="478500"/>
           </a:xfrm>
           <a:prstGeom prst="rect">
             <a:avLst/>
@@ -22595,7 +23541,7 @@
         </p:nvSpPr>
         <p:spPr>
           <a:xfrm>
-            <a:off x="822960" y="340907"/>
+            <a:off x="822960" y="510363"/>
             <a:ext cx="9601200" cy="615600"/>
           </a:xfrm>
           <a:prstGeom prst="rect">
@@ -22639,7 +23585,7 @@
                 <a:cs typeface="Georgia"/>
                 <a:sym typeface="Georgia"/>
               </a:rPr>
-              <a:t>Proposed System</a:t>
+              <a:t>Current Systems (Deep Learning Baseline) </a:t>
             </a:r>
             <a:endParaRPr b="0" i="0" sz="1400" u="none" cap="none" strike="noStrike">
               <a:solidFill>
@@ -22661,7 +23607,7 @@
         </p:nvSpPr>
         <p:spPr>
           <a:xfrm>
-            <a:off x="822960" y="1255307"/>
+            <a:off x="822960" y="1424763"/>
             <a:ext cx="457200" cy="27300"/>
           </a:xfrm>
           <a:prstGeom prst="rect">
@@ -22733,8 +23679,8 @@
         </p:nvSpPr>
         <p:spPr>
           <a:xfrm>
-            <a:off x="822950" y="1961438"/>
-            <a:ext cx="10058400" cy="3835500"/>
+            <a:off x="822950" y="1917238"/>
+            <a:ext cx="10058400" cy="400200"/>
           </a:xfrm>
           <a:prstGeom prst="rect">
             <a:avLst/>
@@ -22750,357 +23696,12 @@
           </a:bodyPr>
           <a:lstStyle/>
           <a:p>
-            <a:pPr indent="0" lvl="0" marL="0" rtl="0" algn="l">
-              <a:lnSpc>
-                <a:spcPct val="115000"/>
-              </a:lnSpc>
-              <a:spcBef>
-                <a:spcPts val="1800"/>
-              </a:spcBef>
-              <a:spcAft>
-                <a:spcPts val="0"/>
-              </a:spcAft>
-              <a:buClr>
-                <a:schemeClr val="dk1"/>
-              </a:buClr>
-              <a:buSzPts val="1100"/>
-              <a:buFont typeface="Arial"/>
-              <a:buNone/>
-            </a:pPr>
-            <a:r>
-              <a:rPr b="1" lang="en-US" sz="1700">
-                <a:solidFill>
-                  <a:schemeClr val="lt1"/>
-                </a:solidFill>
-              </a:rPr>
-              <a:t>System Architecture</a:t>
-            </a:r>
-            <a:endParaRPr b="1" sz="1700">
-              <a:solidFill>
-                <a:schemeClr val="lt1"/>
-              </a:solidFill>
-            </a:endParaRPr>
-          </a:p>
-          <a:p>
-            <a:pPr indent="0" lvl="0" marL="0" rtl="0" algn="l">
-              <a:lnSpc>
-                <a:spcPct val="115000"/>
-              </a:lnSpc>
-              <a:spcBef>
-                <a:spcPts val="400"/>
-              </a:spcBef>
-              <a:spcAft>
-                <a:spcPts val="0"/>
-              </a:spcAft>
-              <a:buClr>
-                <a:schemeClr val="dk1"/>
-              </a:buClr>
-              <a:buSzPts val="1100"/>
-              <a:buFont typeface="Arial"/>
-              <a:buNone/>
-            </a:pPr>
-            <a:r>
-              <a:rPr lang="en-US" sz="1100">
-                <a:solidFill>
-                  <a:schemeClr val="lt1"/>
-                </a:solidFill>
-              </a:rPr>
-              <a:t>Video → Frame Extraction → Preprocessing → ResNet18 → Classification</a:t>
-            </a:r>
-            <a:endParaRPr sz="1100">
-              <a:solidFill>
-                <a:schemeClr val="lt1"/>
-              </a:solidFill>
-            </a:endParaRPr>
-          </a:p>
-          <a:p>
-            <a:pPr indent="0" lvl="0" marL="0" rtl="0" algn="l">
-              <a:lnSpc>
-                <a:spcPct val="115000"/>
-              </a:lnSpc>
-              <a:spcBef>
-                <a:spcPts val="1800"/>
-              </a:spcBef>
-              <a:spcAft>
-                <a:spcPts val="0"/>
-              </a:spcAft>
-              <a:buClr>
-                <a:schemeClr val="dk1"/>
-              </a:buClr>
-              <a:buSzPts val="1100"/>
-              <a:buFont typeface="Arial"/>
-              <a:buNone/>
-            </a:pPr>
-            <a:r>
-              <a:rPr b="1" lang="en-US" sz="1700">
-                <a:solidFill>
-                  <a:schemeClr val="lt1"/>
-                </a:solidFill>
-              </a:rPr>
-              <a:t>Key Components</a:t>
-            </a:r>
-            <a:endParaRPr b="1" sz="1700">
-              <a:solidFill>
-                <a:schemeClr val="lt1"/>
-              </a:solidFill>
-            </a:endParaRPr>
-          </a:p>
-          <a:p>
-            <a:pPr indent="-298450" lvl="0" marL="457200" rtl="0" algn="l">
-              <a:lnSpc>
-                <a:spcPct val="115000"/>
-              </a:lnSpc>
-              <a:spcBef>
-                <a:spcPts val="1200"/>
-              </a:spcBef>
-              <a:spcAft>
-                <a:spcPts val="0"/>
-              </a:spcAft>
-              <a:buClr>
-                <a:schemeClr val="lt1"/>
-              </a:buClr>
-              <a:buSzPts val="1100"/>
-              <a:buChar char="●"/>
-            </a:pPr>
-            <a:r>
-              <a:rPr lang="en-US" sz="1100">
-                <a:solidFill>
-                  <a:schemeClr val="lt1"/>
-                </a:solidFill>
-              </a:rPr>
-              <a:t>ResNet18 (transfer learning)</a:t>
-            </a:r>
-            <a:endParaRPr sz="1100">
-              <a:solidFill>
-                <a:schemeClr val="lt1"/>
-              </a:solidFill>
-            </a:endParaRPr>
-          </a:p>
-          <a:p>
-            <a:pPr indent="-298450" lvl="0" marL="457200" rtl="0" algn="l">
-              <a:lnSpc>
-                <a:spcPct val="115000"/>
-              </a:lnSpc>
-              <a:spcBef>
-                <a:spcPts val="0"/>
-              </a:spcBef>
-              <a:spcAft>
-                <a:spcPts val="0"/>
-              </a:spcAft>
-              <a:buClr>
-                <a:schemeClr val="lt1"/>
-              </a:buClr>
-              <a:buSzPts val="1100"/>
-              <a:buChar char="●"/>
-            </a:pPr>
-            <a:r>
-              <a:rPr lang="en-US" sz="1100">
-                <a:solidFill>
-                  <a:schemeClr val="lt1"/>
-                </a:solidFill>
-              </a:rPr>
-              <a:t>CrossEntropy Loss</a:t>
-            </a:r>
-            <a:endParaRPr sz="1100">
-              <a:solidFill>
-                <a:schemeClr val="lt1"/>
-              </a:solidFill>
-            </a:endParaRPr>
-          </a:p>
-          <a:p>
-            <a:pPr indent="-298450" lvl="0" marL="457200" rtl="0" algn="l">
-              <a:lnSpc>
-                <a:spcPct val="115000"/>
-              </a:lnSpc>
-              <a:spcBef>
-                <a:spcPts val="0"/>
-              </a:spcBef>
-              <a:spcAft>
-                <a:spcPts val="0"/>
-              </a:spcAft>
-              <a:buClr>
-                <a:schemeClr val="lt1"/>
-              </a:buClr>
-              <a:buSzPts val="1100"/>
-              <a:buChar char="●"/>
-            </a:pPr>
-            <a:r>
-              <a:rPr lang="en-US" sz="1100">
-                <a:solidFill>
-                  <a:schemeClr val="lt1"/>
-                </a:solidFill>
-              </a:rPr>
-              <a:t>Adam optimizer</a:t>
-            </a:r>
-            <a:endParaRPr sz="1100">
-              <a:solidFill>
-                <a:schemeClr val="lt1"/>
-              </a:solidFill>
-            </a:endParaRPr>
-          </a:p>
-          <a:p>
-            <a:pPr indent="-298450" lvl="0" marL="457200" rtl="0" algn="l">
-              <a:lnSpc>
-                <a:spcPct val="115000"/>
-              </a:lnSpc>
-              <a:spcBef>
-                <a:spcPts val="0"/>
-              </a:spcBef>
-              <a:spcAft>
-                <a:spcPts val="0"/>
-              </a:spcAft>
-              <a:buClr>
-                <a:schemeClr val="lt1"/>
-              </a:buClr>
-              <a:buSzPts val="1100"/>
-              <a:buChar char="●"/>
-            </a:pPr>
-            <a:r>
-              <a:rPr lang="en-US" sz="1100">
-                <a:solidFill>
-                  <a:schemeClr val="lt1"/>
-                </a:solidFill>
-              </a:rPr>
-              <a:t>K-Fold Cross Validation</a:t>
-            </a:r>
-            <a:endParaRPr sz="1100">
-              <a:solidFill>
-                <a:schemeClr val="lt1"/>
-              </a:solidFill>
-            </a:endParaRPr>
-          </a:p>
-          <a:p>
-            <a:pPr indent="-298450" lvl="0" marL="457200" rtl="0" algn="l">
-              <a:lnSpc>
-                <a:spcPct val="115000"/>
-              </a:lnSpc>
-              <a:spcBef>
-                <a:spcPts val="0"/>
-              </a:spcBef>
-              <a:spcAft>
-                <a:spcPts val="0"/>
-              </a:spcAft>
-              <a:buClr>
-                <a:schemeClr val="lt1"/>
-              </a:buClr>
-              <a:buSzPts val="1100"/>
-              <a:buChar char="●"/>
-            </a:pPr>
-            <a:r>
-              <a:rPr lang="en-US" sz="1100">
-                <a:solidFill>
-                  <a:schemeClr val="lt1"/>
-                </a:solidFill>
-              </a:rPr>
-              <a:t>Early stopping</a:t>
-            </a:r>
-            <a:endParaRPr sz="1100">
-              <a:solidFill>
-                <a:schemeClr val="lt1"/>
-              </a:solidFill>
-            </a:endParaRPr>
-          </a:p>
-          <a:p>
-            <a:pPr indent="0" lvl="0" marL="0" rtl="0" algn="l">
-              <a:lnSpc>
-                <a:spcPct val="115000"/>
-              </a:lnSpc>
-              <a:spcBef>
-                <a:spcPts val="1800"/>
-              </a:spcBef>
-              <a:spcAft>
-                <a:spcPts val="0"/>
-              </a:spcAft>
-              <a:buClr>
-                <a:schemeClr val="dk1"/>
-              </a:buClr>
-              <a:buSzPts val="1100"/>
-              <a:buFont typeface="Arial"/>
-              <a:buNone/>
-            </a:pPr>
-            <a:r>
-              <a:rPr b="1" lang="en-US" sz="1700">
-                <a:solidFill>
-                  <a:schemeClr val="lt1"/>
-                </a:solidFill>
-              </a:rPr>
-              <a:t>Output Classes</a:t>
-            </a:r>
-            <a:endParaRPr b="1" sz="1700">
-              <a:solidFill>
-                <a:schemeClr val="lt1"/>
-              </a:solidFill>
-            </a:endParaRPr>
-          </a:p>
-          <a:p>
-            <a:pPr indent="-298450" lvl="0" marL="457200" rtl="0" algn="l">
-              <a:lnSpc>
-                <a:spcPct val="115000"/>
-              </a:lnSpc>
-              <a:spcBef>
-                <a:spcPts val="1200"/>
-              </a:spcBef>
-              <a:spcAft>
-                <a:spcPts val="0"/>
-              </a:spcAft>
-              <a:buClr>
-                <a:schemeClr val="lt1"/>
-              </a:buClr>
-              <a:buSzPts val="1100"/>
-              <a:buChar char="●"/>
-            </a:pPr>
-            <a:r>
-              <a:rPr lang="en-US" sz="1100">
-                <a:solidFill>
-                  <a:schemeClr val="lt1"/>
-                </a:solidFill>
-              </a:rPr>
-              <a:t>Happy (1)</a:t>
-            </a:r>
-            <a:endParaRPr sz="1100">
-              <a:solidFill>
-                <a:schemeClr val="lt1"/>
-              </a:solidFill>
-            </a:endParaRPr>
-          </a:p>
-          <a:p>
-            <a:pPr indent="-298450" lvl="0" marL="457200" rtl="0" algn="l">
-              <a:lnSpc>
-                <a:spcPct val="115000"/>
-              </a:lnSpc>
-              <a:spcBef>
-                <a:spcPts val="0"/>
-              </a:spcBef>
-              <a:spcAft>
-                <a:spcPts val="0"/>
-              </a:spcAft>
-              <a:buClr>
-                <a:schemeClr val="lt1"/>
-              </a:buClr>
-              <a:buSzPts val="1100"/>
-              <a:buChar char="●"/>
-            </a:pPr>
-            <a:r>
-              <a:rPr lang="en-US" sz="1100">
-                <a:solidFill>
-                  <a:schemeClr val="lt1"/>
-                </a:solidFill>
-              </a:rPr>
-              <a:t>Not Happy (0)</a:t>
-            </a:r>
-            <a:endParaRPr sz="1100">
-              <a:solidFill>
-                <a:schemeClr val="lt1"/>
-              </a:solidFill>
-            </a:endParaRPr>
-          </a:p>
-          <a:p>
             <a:pPr indent="0" lvl="0" marL="0" marR="0" rtl="0" algn="l">
               <a:lnSpc>
                 <a:spcPct val="100000"/>
               </a:lnSpc>
               <a:spcBef>
-                <a:spcPts val="1200"/>
+                <a:spcPts val="1000"/>
               </a:spcBef>
               <a:spcAft>
                 <a:spcPts val="0"/>
@@ -23193,6 +23794,34 @@
           </a:p>
         </p:txBody>
       </p:sp>
+      <p:pic>
+        <p:nvPicPr>
+          <p:cNvPr id="134" name="Google Shape;134;p18"/>
+          <p:cNvPicPr preferRelativeResize="0"/>
+          <p:nvPr/>
+        </p:nvPicPr>
+        <p:blipFill>
+          <a:blip r:embed="rId3">
+            <a:alphaModFix/>
+          </a:blip>
+          <a:stretch>
+            <a:fillRect/>
+          </a:stretch>
+        </p:blipFill>
+        <p:spPr>
+          <a:xfrm>
+            <a:off x="733425" y="1831888"/>
+            <a:ext cx="7677150" cy="3648075"/>
+          </a:xfrm>
+          <a:prstGeom prst="rect">
+            <a:avLst/>
+          </a:prstGeom>
+          <a:noFill/>
+          <a:ln>
+            <a:noFill/>
+          </a:ln>
+        </p:spPr>
+      </p:pic>
     </p:spTree>
   </p:cSld>
   <p:clrMapOvr>
@@ -23213,7 +23842,7 @@
     </p:bg>
     <p:spTree>
       <p:nvGrpSpPr>
-        <p:cNvPr id="137" name="Shape 137"/>
+        <p:cNvPr id="138" name="Shape 138"/>
         <p:cNvGrpSpPr/>
         <p:nvPr/>
       </p:nvGrpSpPr>
@@ -23227,14 +23856,14 @@
       </p:grpSpPr>
       <p:sp>
         <p:nvSpPr>
-          <p:cNvPr id="138" name="Google Shape;138;p19"/>
+          <p:cNvPr id="139" name="Google Shape;139;p19"/>
           <p:cNvSpPr/>
           <p:nvPr/>
         </p:nvSpPr>
         <p:spPr>
           <a:xfrm>
             <a:off x="0" y="0"/>
-            <a:ext cx="9144000" cy="438600"/>
+            <a:ext cx="9144000" cy="318900"/>
           </a:xfrm>
           <a:prstGeom prst="rect">
             <a:avLst/>
@@ -23299,13 +23928,13 @@
       </p:sp>
       <p:sp>
         <p:nvSpPr>
-          <p:cNvPr id="139" name="Google Shape;139;p19"/>
+          <p:cNvPr id="140" name="Google Shape;140;p19"/>
           <p:cNvSpPr txBox="1"/>
           <p:nvPr/>
         </p:nvSpPr>
         <p:spPr>
           <a:xfrm>
-            <a:off x="822960" y="450555"/>
+            <a:off x="822960" y="340907"/>
             <a:ext cx="9601200" cy="615600"/>
           </a:xfrm>
           <a:prstGeom prst="rect">
@@ -23349,7 +23978,7 @@
                 <a:cs typeface="Georgia"/>
                 <a:sym typeface="Georgia"/>
               </a:rPr>
-              <a:t>Validation &amp; Testing Setup</a:t>
+              <a:t>Proposed System</a:t>
             </a:r>
             <a:endParaRPr b="0" i="0" sz="1400" u="none" cap="none" strike="noStrike">
               <a:solidFill>
@@ -23365,13 +23994,13 @@
       </p:sp>
       <p:sp>
         <p:nvSpPr>
-          <p:cNvPr id="140" name="Google Shape;140;p19"/>
+          <p:cNvPr id="141" name="Google Shape;141;p19"/>
           <p:cNvSpPr/>
           <p:nvPr/>
         </p:nvSpPr>
         <p:spPr>
           <a:xfrm>
-            <a:off x="822960" y="1364955"/>
+            <a:off x="822960" y="1255307"/>
             <a:ext cx="457200" cy="27300"/>
           </a:xfrm>
           <a:prstGeom prst="rect">
@@ -23437,14 +24066,14 @@
       </p:sp>
       <p:sp>
         <p:nvSpPr>
-          <p:cNvPr id="141" name="Google Shape;141;p19"/>
+          <p:cNvPr id="142" name="Google Shape;142;p19"/>
           <p:cNvSpPr txBox="1"/>
           <p:nvPr/>
         </p:nvSpPr>
         <p:spPr>
           <a:xfrm>
-            <a:off x="822960" y="1720500"/>
-            <a:ext cx="10058400" cy="4522200"/>
+            <a:off x="822950" y="1961438"/>
+            <a:ext cx="10058400" cy="3835500"/>
           </a:xfrm>
           <a:prstGeom prst="rect">
             <a:avLst/>
@@ -23483,7 +24112,71 @@
                   <a:schemeClr val="lt1"/>
                 </a:solidFill>
               </a:rPr>
-              <a:t>Dataset Strategy</a:t>
+              <a:t>System Architecture</a:t>
+            </a:r>
+            <a:endParaRPr b="1" sz="1700">
+              <a:solidFill>
+                <a:schemeClr val="lt1"/>
+              </a:solidFill>
+            </a:endParaRPr>
+          </a:p>
+          <a:p>
+            <a:pPr indent="0" lvl="0" marL="0" rtl="0" algn="l">
+              <a:lnSpc>
+                <a:spcPct val="115000"/>
+              </a:lnSpc>
+              <a:spcBef>
+                <a:spcPts val="400"/>
+              </a:spcBef>
+              <a:spcAft>
+                <a:spcPts val="0"/>
+              </a:spcAft>
+              <a:buClr>
+                <a:schemeClr val="dk1"/>
+              </a:buClr>
+              <a:buSzPts val="1100"/>
+              <a:buFont typeface="Arial"/>
+              <a:buNone/>
+            </a:pPr>
+            <a:r>
+              <a:rPr lang="en-US" sz="1100">
+                <a:solidFill>
+                  <a:schemeClr val="lt1"/>
+                </a:solidFill>
+              </a:rPr>
+              <a:t>Video → Frame Extraction → Preprocessing → ResNet18 → Classification</a:t>
+            </a:r>
+            <a:endParaRPr sz="1100">
+              <a:solidFill>
+                <a:schemeClr val="lt1"/>
+              </a:solidFill>
+            </a:endParaRPr>
+          </a:p>
+          <a:p>
+            <a:pPr indent="0" lvl="0" marL="0" rtl="0" algn="l">
+              <a:lnSpc>
+                <a:spcPct val="115000"/>
+              </a:lnSpc>
+              <a:spcBef>
+                <a:spcPts val="1800"/>
+              </a:spcBef>
+              <a:spcAft>
+                <a:spcPts val="0"/>
+              </a:spcAft>
+              <a:buClr>
+                <a:schemeClr val="dk1"/>
+              </a:buClr>
+              <a:buSzPts val="1100"/>
+              <a:buFont typeface="Arial"/>
+              <a:buNone/>
+            </a:pPr>
+            <a:r>
+              <a:rPr b="1" lang="en-US" sz="1700">
+                <a:solidFill>
+                  <a:schemeClr val="lt1"/>
+                </a:solidFill>
+              </a:rPr>
+              <a:t>Key Components</a:t>
             </a:r>
             <a:endParaRPr b="1" sz="1700">
               <a:solidFill>
@@ -23514,7 +24207,7 @@
                   <a:schemeClr val="lt1"/>
                 </a:solidFill>
               </a:rPr>
-              <a:t>RAVDESS → Training</a:t>
+              <a:t>ResNet18 (transfer learning)</a:t>
             </a:r>
             <a:endParaRPr sz="1100">
               <a:solidFill>
@@ -23545,7 +24238,7 @@
                   <a:schemeClr val="lt1"/>
                 </a:solidFill>
               </a:rPr>
-              <a:t>CREMA-D → Validation</a:t>
+              <a:t>CrossEntropy Loss</a:t>
             </a:r>
             <a:endParaRPr sz="1100">
               <a:solidFill>
@@ -23576,7 +24269,69 @@
                   <a:schemeClr val="lt1"/>
                 </a:solidFill>
               </a:rPr>
-              <a:t>AFEW → Testing</a:t>
+              <a:t>Adam optimizer</a:t>
+            </a:r>
+            <a:endParaRPr sz="1100">
+              <a:solidFill>
+                <a:schemeClr val="lt1"/>
+              </a:solidFill>
+            </a:endParaRPr>
+          </a:p>
+          <a:p>
+            <a:pPr indent="-298450" lvl="0" marL="457200" rtl="0" algn="l">
+              <a:lnSpc>
+                <a:spcPct val="115000"/>
+              </a:lnSpc>
+              <a:spcBef>
+                <a:spcPts val="0"/>
+              </a:spcBef>
+              <a:spcAft>
+                <a:spcPts val="0"/>
+              </a:spcAft>
+              <a:buClr>
+                <a:schemeClr val="lt1"/>
+              </a:buClr>
+              <a:buSzPts val="1100"/>
+              <a:buChar char="●"/>
+            </a:pPr>
+            <a:r>
+              <a:rPr lang="en-US" sz="1100">
+                <a:solidFill>
+                  <a:schemeClr val="lt1"/>
+                </a:solidFill>
+              </a:rPr>
+              <a:t>K-Fold Cross Validation</a:t>
+            </a:r>
+            <a:endParaRPr sz="1100">
+              <a:solidFill>
+                <a:schemeClr val="lt1"/>
+              </a:solidFill>
+            </a:endParaRPr>
+          </a:p>
+          <a:p>
+            <a:pPr indent="-298450" lvl="0" marL="457200" rtl="0" algn="l">
+              <a:lnSpc>
+                <a:spcPct val="115000"/>
+              </a:lnSpc>
+              <a:spcBef>
+                <a:spcPts val="0"/>
+              </a:spcBef>
+              <a:spcAft>
+                <a:spcPts val="0"/>
+              </a:spcAft>
+              <a:buClr>
+                <a:schemeClr val="lt1"/>
+              </a:buClr>
+              <a:buSzPts val="1100"/>
+              <a:buChar char="●"/>
+            </a:pPr>
+            <a:r>
+              <a:rPr lang="en-US" sz="1100">
+                <a:solidFill>
+                  <a:schemeClr val="lt1"/>
+                </a:solidFill>
+              </a:rPr>
+              <a:t>Early stopping</a:t>
             </a:r>
             <a:endParaRPr sz="1100">
               <a:solidFill>
@@ -23608,7 +24363,7 @@
                   <a:schemeClr val="lt1"/>
                 </a:solidFill>
               </a:rPr>
-              <a:t>Why this design matters</a:t>
+              <a:t>Output Classes</a:t>
             </a:r>
             <a:endParaRPr b="1" sz="1700">
               <a:solidFill>
@@ -23639,7 +24394,7 @@
                   <a:schemeClr val="lt1"/>
                 </a:solidFill>
               </a:rPr>
-              <a:t>Tests cross-dataset generalization</a:t>
+              <a:t>Happy (1)</a:t>
             </a:r>
             <a:endParaRPr sz="1100">
               <a:solidFill>
@@ -23670,225 +24425,7 @@
                   <a:schemeClr val="lt1"/>
                 </a:solidFill>
               </a:rPr>
-              <a:t>Simulates real-world conditions</a:t>
-            </a:r>
-            <a:endParaRPr sz="1100">
-              <a:solidFill>
-                <a:schemeClr val="lt1"/>
-              </a:solidFill>
-            </a:endParaRPr>
-          </a:p>
-          <a:p>
-            <a:pPr indent="-298450" lvl="0" marL="457200" rtl="0" algn="l">
-              <a:lnSpc>
-                <a:spcPct val="115000"/>
-              </a:lnSpc>
-              <a:spcBef>
-                <a:spcPts val="0"/>
-              </a:spcBef>
-              <a:spcAft>
-                <a:spcPts val="0"/>
-              </a:spcAft>
-              <a:buClr>
-                <a:schemeClr val="lt1"/>
-              </a:buClr>
-              <a:buSzPts val="1100"/>
-              <a:buChar char="●"/>
-            </a:pPr>
-            <a:r>
-              <a:rPr lang="en-US" sz="1100">
-                <a:solidFill>
-                  <a:schemeClr val="lt1"/>
-                </a:solidFill>
-              </a:rPr>
-              <a:t>Reduces overfitting risk</a:t>
-            </a:r>
-            <a:endParaRPr sz="1100">
-              <a:solidFill>
-                <a:schemeClr val="lt1"/>
-              </a:solidFill>
-            </a:endParaRPr>
-          </a:p>
-          <a:p>
-            <a:pPr indent="0" lvl="0" marL="0" rtl="0" algn="l">
-              <a:lnSpc>
-                <a:spcPct val="115000"/>
-              </a:lnSpc>
-              <a:spcBef>
-                <a:spcPts val="1800"/>
-              </a:spcBef>
-              <a:spcAft>
-                <a:spcPts val="0"/>
-              </a:spcAft>
-              <a:buClr>
-                <a:schemeClr val="dk1"/>
-              </a:buClr>
-              <a:buSzPts val="1100"/>
-              <a:buFont typeface="Arial"/>
-              <a:buNone/>
-            </a:pPr>
-            <a:r>
-              <a:rPr b="1" lang="en-US" sz="1700">
-                <a:solidFill>
-                  <a:schemeClr val="lt1"/>
-                </a:solidFill>
-              </a:rPr>
-              <a:t>Metrics Used</a:t>
-            </a:r>
-            <a:endParaRPr b="1" sz="1700">
-              <a:solidFill>
-                <a:schemeClr val="lt1"/>
-              </a:solidFill>
-            </a:endParaRPr>
-          </a:p>
-          <a:p>
-            <a:pPr indent="-298450" lvl="0" marL="457200" rtl="0" algn="l">
-              <a:lnSpc>
-                <a:spcPct val="115000"/>
-              </a:lnSpc>
-              <a:spcBef>
-                <a:spcPts val="1200"/>
-              </a:spcBef>
-              <a:spcAft>
-                <a:spcPts val="0"/>
-              </a:spcAft>
-              <a:buClr>
-                <a:schemeClr val="lt1"/>
-              </a:buClr>
-              <a:buSzPts val="1100"/>
-              <a:buChar char="●"/>
-            </a:pPr>
-            <a:r>
-              <a:rPr lang="en-US" sz="1100">
-                <a:solidFill>
-                  <a:schemeClr val="lt1"/>
-                </a:solidFill>
-              </a:rPr>
-              <a:t>Accuracy</a:t>
-            </a:r>
-            <a:endParaRPr sz="1100">
-              <a:solidFill>
-                <a:schemeClr val="lt1"/>
-              </a:solidFill>
-            </a:endParaRPr>
-          </a:p>
-          <a:p>
-            <a:pPr indent="-298450" lvl="0" marL="457200" rtl="0" algn="l">
-              <a:lnSpc>
-                <a:spcPct val="115000"/>
-              </a:lnSpc>
-              <a:spcBef>
-                <a:spcPts val="0"/>
-              </a:spcBef>
-              <a:spcAft>
-                <a:spcPts val="0"/>
-              </a:spcAft>
-              <a:buClr>
-                <a:schemeClr val="lt1"/>
-              </a:buClr>
-              <a:buSzPts val="1100"/>
-              <a:buChar char="●"/>
-            </a:pPr>
-            <a:r>
-              <a:rPr lang="en-US" sz="1100">
-                <a:solidFill>
-                  <a:schemeClr val="lt1"/>
-                </a:solidFill>
-              </a:rPr>
-              <a:t>Precision</a:t>
-            </a:r>
-            <a:endParaRPr sz="1100">
-              <a:solidFill>
-                <a:schemeClr val="lt1"/>
-              </a:solidFill>
-            </a:endParaRPr>
-          </a:p>
-          <a:p>
-            <a:pPr indent="-298450" lvl="0" marL="457200" rtl="0" algn="l">
-              <a:lnSpc>
-                <a:spcPct val="115000"/>
-              </a:lnSpc>
-              <a:spcBef>
-                <a:spcPts val="0"/>
-              </a:spcBef>
-              <a:spcAft>
-                <a:spcPts val="0"/>
-              </a:spcAft>
-              <a:buClr>
-                <a:schemeClr val="lt1"/>
-              </a:buClr>
-              <a:buSzPts val="1100"/>
-              <a:buChar char="●"/>
-            </a:pPr>
-            <a:r>
-              <a:rPr lang="en-US" sz="1100">
-                <a:solidFill>
-                  <a:schemeClr val="lt1"/>
-                </a:solidFill>
-              </a:rPr>
-              <a:t>Recall</a:t>
-            </a:r>
-            <a:endParaRPr sz="1100">
-              <a:solidFill>
-                <a:schemeClr val="lt1"/>
-              </a:solidFill>
-            </a:endParaRPr>
-          </a:p>
-          <a:p>
-            <a:pPr indent="-298450" lvl="0" marL="457200" rtl="0" algn="l">
-              <a:lnSpc>
-                <a:spcPct val="115000"/>
-              </a:lnSpc>
-              <a:spcBef>
-                <a:spcPts val="0"/>
-              </a:spcBef>
-              <a:spcAft>
-                <a:spcPts val="0"/>
-              </a:spcAft>
-              <a:buClr>
-                <a:schemeClr val="lt1"/>
-              </a:buClr>
-              <a:buSzPts val="1100"/>
-              <a:buChar char="●"/>
-            </a:pPr>
-            <a:r>
-              <a:rPr lang="en-US" sz="1100">
-                <a:solidFill>
-                  <a:schemeClr val="lt1"/>
-                </a:solidFill>
-              </a:rPr>
-              <a:t>F1-score</a:t>
-            </a:r>
-            <a:endParaRPr sz="1100">
-              <a:solidFill>
-                <a:schemeClr val="lt1"/>
-              </a:solidFill>
-            </a:endParaRPr>
-          </a:p>
-          <a:p>
-            <a:pPr indent="-298450" lvl="0" marL="457200" rtl="0" algn="l">
-              <a:lnSpc>
-                <a:spcPct val="115000"/>
-              </a:lnSpc>
-              <a:spcBef>
-                <a:spcPts val="0"/>
-              </a:spcBef>
-              <a:spcAft>
-                <a:spcPts val="0"/>
-              </a:spcAft>
-              <a:buClr>
-                <a:schemeClr val="lt1"/>
-              </a:buClr>
-              <a:buSzPts val="1100"/>
-              <a:buChar char="●"/>
-            </a:pPr>
-            <a:r>
-              <a:rPr lang="en-US" sz="1100">
-                <a:solidFill>
-                  <a:schemeClr val="lt1"/>
-                </a:solidFill>
-              </a:rPr>
-              <a:t>ROC Curve</a:t>
+              <a:t>Not Happy (0)</a:t>
             </a:r>
             <a:endParaRPr sz="1100">
               <a:solidFill>
@@ -23931,7 +24468,7 @@
       </p:sp>
       <p:sp>
         <p:nvSpPr>
-          <p:cNvPr id="142" name="Google Shape;142;p19"/>
+          <p:cNvPr id="143" name="Google Shape;143;p19"/>
           <p:cNvSpPr txBox="1"/>
           <p:nvPr/>
         </p:nvSpPr>
@@ -24015,7 +24552,7 @@
     </p:bg>
     <p:spTree>
       <p:nvGrpSpPr>
-        <p:cNvPr id="146" name="Shape 146"/>
+        <p:cNvPr id="147" name="Shape 147"/>
         <p:cNvGrpSpPr/>
         <p:nvPr/>
       </p:nvGrpSpPr>
@@ -24029,14 +24566,14 @@
       </p:grpSpPr>
       <p:sp>
         <p:nvSpPr>
-          <p:cNvPr id="147" name="Google Shape;147;p20"/>
+          <p:cNvPr id="148" name="Google Shape;148;p20"/>
           <p:cNvSpPr/>
           <p:nvPr/>
         </p:nvSpPr>
         <p:spPr>
           <a:xfrm>
             <a:off x="0" y="0"/>
-            <a:ext cx="9144000" cy="498300"/>
+            <a:ext cx="9144000" cy="438600"/>
           </a:xfrm>
           <a:prstGeom prst="rect">
             <a:avLst/>
@@ -24101,13 +24638,13 @@
       </p:sp>
       <p:sp>
         <p:nvSpPr>
-          <p:cNvPr id="148" name="Google Shape;148;p20"/>
+          <p:cNvPr id="149" name="Google Shape;149;p20"/>
           <p:cNvSpPr txBox="1"/>
           <p:nvPr/>
         </p:nvSpPr>
         <p:spPr>
           <a:xfrm>
-            <a:off x="822960" y="510363"/>
+            <a:off x="822960" y="450555"/>
             <a:ext cx="9601200" cy="615600"/>
           </a:xfrm>
           <a:prstGeom prst="rect">
@@ -24151,7 +24688,7 @@
                 <a:cs typeface="Georgia"/>
                 <a:sym typeface="Georgia"/>
               </a:rPr>
-              <a:t>Results &amp; Observations </a:t>
+              <a:t>Validation &amp; Testing Setup</a:t>
             </a:r>
             <a:endParaRPr b="0" i="0" sz="1400" u="none" cap="none" strike="noStrike">
               <a:solidFill>
@@ -24167,13 +24704,13 @@
       </p:sp>
       <p:sp>
         <p:nvSpPr>
-          <p:cNvPr id="149" name="Google Shape;149;p20"/>
+          <p:cNvPr id="150" name="Google Shape;150;p20"/>
           <p:cNvSpPr/>
           <p:nvPr/>
         </p:nvSpPr>
         <p:spPr>
           <a:xfrm>
-            <a:off x="822960" y="1424763"/>
+            <a:off x="822960" y="1364955"/>
             <a:ext cx="457200" cy="27300"/>
           </a:xfrm>
           <a:prstGeom prst="rect">
@@ -24239,14 +24776,14 @@
       </p:sp>
       <p:sp>
         <p:nvSpPr>
-          <p:cNvPr id="150" name="Google Shape;150;p20"/>
+          <p:cNvPr id="151" name="Google Shape;151;p20"/>
           <p:cNvSpPr txBox="1"/>
           <p:nvPr/>
         </p:nvSpPr>
         <p:spPr>
           <a:xfrm>
-            <a:off x="822950" y="1973675"/>
-            <a:ext cx="10058400" cy="3953400"/>
+            <a:off x="822960" y="1720500"/>
+            <a:ext cx="10058400" cy="4522200"/>
           </a:xfrm>
           <a:prstGeom prst="rect">
             <a:avLst/>
@@ -24285,7 +24822,7 @@
                   <a:schemeClr val="lt1"/>
                 </a:solidFill>
               </a:rPr>
-              <a:t>Validation Results</a:t>
+              <a:t>Dataset Strategy</a:t>
             </a:r>
             <a:endParaRPr b="1" sz="1700">
               <a:solidFill>
@@ -24316,17 +24853,9 @@
                   <a:schemeClr val="lt1"/>
                 </a:solidFill>
               </a:rPr>
-              <a:t>Accuracy: </a:t>
+              <a:t>RAVDESS → Training</a:t>
             </a:r>
-            <a:r>
-              <a:rPr b="1" lang="en-US" sz="1100">
-                <a:solidFill>
-                  <a:schemeClr val="lt1"/>
-                </a:solidFill>
-              </a:rPr>
-              <a:t>82.82%</a:t>
-            </a:r>
-            <a:endParaRPr b="1" sz="1100">
+            <a:endParaRPr sz="1100">
               <a:solidFill>
                 <a:schemeClr val="lt1"/>
               </a:solidFill>
@@ -24355,17 +24884,9 @@
                   <a:schemeClr val="lt1"/>
                 </a:solidFill>
               </a:rPr>
-              <a:t>Precision: </a:t>
+              <a:t>CREMA-D → Validation</a:t>
             </a:r>
-            <a:r>
-              <a:rPr b="1" lang="en-US" sz="1100">
-                <a:solidFill>
-                  <a:schemeClr val="lt1"/>
-                </a:solidFill>
-              </a:rPr>
-              <a:t>0.00</a:t>
-            </a:r>
-            <a:endParaRPr b="1" sz="1100">
+            <a:endParaRPr sz="1100">
               <a:solidFill>
                 <a:schemeClr val="lt1"/>
               </a:solidFill>
@@ -24394,56 +24915,9 @@
                   <a:schemeClr val="lt1"/>
                 </a:solidFill>
               </a:rPr>
-              <a:t>Recall: </a:t>
+              <a:t>AFEW → Testing</a:t>
             </a:r>
-            <a:r>
-              <a:rPr b="1" lang="en-US" sz="1100">
-                <a:solidFill>
-                  <a:schemeClr val="lt1"/>
-                </a:solidFill>
-              </a:rPr>
-              <a:t>0.00</a:t>
-            </a:r>
-            <a:endParaRPr b="1" sz="1100">
-              <a:solidFill>
-                <a:schemeClr val="lt1"/>
-              </a:solidFill>
-            </a:endParaRPr>
-          </a:p>
-          <a:p>
-            <a:pPr indent="-298450" lvl="0" marL="457200" rtl="0" algn="l">
-              <a:lnSpc>
-                <a:spcPct val="115000"/>
-              </a:lnSpc>
-              <a:spcBef>
-                <a:spcPts val="0"/>
-              </a:spcBef>
-              <a:spcAft>
-                <a:spcPts val="0"/>
-              </a:spcAft>
-              <a:buClr>
-                <a:schemeClr val="lt1"/>
-              </a:buClr>
-              <a:buSzPts val="1100"/>
-              <a:buChar char="●"/>
-            </a:pPr>
-            <a:r>
-              <a:rPr lang="en-US" sz="1100">
-                <a:solidFill>
-                  <a:schemeClr val="lt1"/>
-                </a:solidFill>
-              </a:rPr>
-              <a:t>F1-score: </a:t>
-            </a:r>
-            <a:r>
-              <a:rPr b="1" lang="en-US" sz="1100">
-                <a:solidFill>
-                  <a:schemeClr val="lt1"/>
-                </a:solidFill>
-              </a:rPr>
-              <a:t>0.00</a:t>
-            </a:r>
-            <a:endParaRPr b="1" sz="1100">
+            <a:endParaRPr sz="1100">
               <a:solidFill>
                 <a:schemeClr val="lt1"/>
               </a:solidFill>
@@ -24473,7 +24947,7 @@
                   <a:schemeClr val="lt1"/>
                 </a:solidFill>
               </a:rPr>
-              <a:t>Testing Results</a:t>
+              <a:t>Why this design matters</a:t>
             </a:r>
             <a:endParaRPr b="1" sz="1700">
               <a:solidFill>
@@ -24504,17 +24978,9 @@
                   <a:schemeClr val="lt1"/>
                 </a:solidFill>
               </a:rPr>
-              <a:t>Accuracy: </a:t>
+              <a:t>Tests cross-dataset generalization</a:t>
             </a:r>
-            <a:r>
-              <a:rPr b="1" lang="en-US" sz="1100">
-                <a:solidFill>
-                  <a:schemeClr val="lt1"/>
-                </a:solidFill>
-              </a:rPr>
-              <a:t>82.62%</a:t>
-            </a:r>
-            <a:endParaRPr b="1" sz="1100">
+            <a:endParaRPr sz="1100">
               <a:solidFill>
                 <a:schemeClr val="lt1"/>
               </a:solidFill>
@@ -24543,7 +25009,38 @@
                   <a:schemeClr val="lt1"/>
                 </a:solidFill>
               </a:rPr>
-              <a:t>Similar failure pattern across datasets</a:t>
+              <a:t>Simulates real-world conditions</a:t>
+            </a:r>
+            <a:endParaRPr sz="1100">
+              <a:solidFill>
+                <a:schemeClr val="lt1"/>
+              </a:solidFill>
+            </a:endParaRPr>
+          </a:p>
+          <a:p>
+            <a:pPr indent="-298450" lvl="0" marL="457200" rtl="0" algn="l">
+              <a:lnSpc>
+                <a:spcPct val="115000"/>
+              </a:lnSpc>
+              <a:spcBef>
+                <a:spcPts val="0"/>
+              </a:spcBef>
+              <a:spcAft>
+                <a:spcPts val="0"/>
+              </a:spcAft>
+              <a:buClr>
+                <a:schemeClr val="lt1"/>
+              </a:buClr>
+              <a:buSzPts val="1100"/>
+              <a:buChar char="●"/>
+            </a:pPr>
+            <a:r>
+              <a:rPr lang="en-US" sz="1100">
+                <a:solidFill>
+                  <a:schemeClr val="lt1"/>
+                </a:solidFill>
+              </a:rPr>
+              <a:t>Reduces overfitting risk</a:t>
             </a:r>
             <a:endParaRPr sz="1100">
               <a:solidFill>
@@ -24575,7 +25072,7 @@
                   <a:schemeClr val="lt1"/>
                 </a:solidFill>
               </a:rPr>
-              <a:t>Key Insight</a:t>
+              <a:t>Metrics Used</a:t>
             </a:r>
             <a:endParaRPr b="1" sz="1700">
               <a:solidFill>
@@ -24584,7 +25081,7 @@
             </a:endParaRPr>
           </a:p>
           <a:p>
-            <a:pPr indent="0" lvl="0" marL="0" rtl="0" algn="l">
+            <a:pPr indent="-298450" lvl="0" marL="457200" rtl="0" algn="l">
               <a:lnSpc>
                 <a:spcPct val="115000"/>
               </a:lnSpc>
@@ -24595,11 +25092,10 @@
                 <a:spcPts val="0"/>
               </a:spcAft>
               <a:buClr>
-                <a:schemeClr val="dk1"/>
+                <a:schemeClr val="lt1"/>
               </a:buClr>
               <a:buSzPts val="1100"/>
-              <a:buFont typeface="Arial"/>
-              <a:buNone/>
+              <a:buChar char="●"/>
             </a:pPr>
             <a:r>
               <a:rPr lang="en-US" sz="1100">
@@ -24607,7 +25103,7 @@
                   <a:schemeClr val="lt1"/>
                 </a:solidFill>
               </a:rPr>
-              <a:t>Model predicted mostly:</a:t>
+              <a:t>Accuracy</a:t>
             </a:r>
             <a:endParaRPr sz="1100">
               <a:solidFill>
@@ -24616,22 +25112,21 @@
             </a:endParaRPr>
           </a:p>
           <a:p>
-            <a:pPr indent="0" lvl="0" marL="0" rtl="0" algn="l">
+            <a:pPr indent="-298450" lvl="0" marL="457200" rtl="0" algn="l">
               <a:lnSpc>
                 <a:spcPct val="115000"/>
               </a:lnSpc>
               <a:spcBef>
-                <a:spcPts val="1200"/>
-              </a:spcBef>
-              <a:spcAft>
-                <a:spcPts val="0"/>
-              </a:spcAft>
-              <a:buClr>
-                <a:schemeClr val="dk1"/>
+                <a:spcPts val="0"/>
+              </a:spcBef>
+              <a:spcAft>
+                <a:spcPts val="0"/>
+              </a:spcAft>
+              <a:buClr>
+                <a:schemeClr val="lt1"/>
               </a:buClr>
               <a:buSzPts val="1100"/>
-              <a:buFont typeface="Arial"/>
-              <a:buNone/>
+              <a:buChar char="●"/>
             </a:pPr>
             <a:r>
               <a:rPr lang="en-US" sz="1100">
@@ -24639,7 +25134,7 @@
                   <a:schemeClr val="lt1"/>
                 </a:solidFill>
               </a:rPr>
-              <a:t>Not Happy</a:t>
+              <a:t>Precision</a:t>
             </a:r>
             <a:endParaRPr sz="1100">
               <a:solidFill>
@@ -24648,22 +25143,21 @@
             </a:endParaRPr>
           </a:p>
           <a:p>
-            <a:pPr indent="0" lvl="0" marL="0" rtl="0" algn="l">
+            <a:pPr indent="-298450" lvl="0" marL="457200" rtl="0" algn="l">
               <a:lnSpc>
                 <a:spcPct val="115000"/>
               </a:lnSpc>
               <a:spcBef>
-                <a:spcPts val="1200"/>
-              </a:spcBef>
-              <a:spcAft>
-                <a:spcPts val="1200"/>
-              </a:spcAft>
-              <a:buClr>
-                <a:schemeClr val="dk1"/>
+                <a:spcPts val="0"/>
+              </a:spcBef>
+              <a:spcAft>
+                <a:spcPts val="0"/>
+              </a:spcAft>
+              <a:buClr>
+                <a:schemeClr val="lt1"/>
               </a:buClr>
               <a:buSzPts val="1100"/>
-              <a:buFont typeface="Arial"/>
-              <a:buNone/>
+              <a:buChar char="●"/>
             </a:pPr>
             <a:r>
               <a:rPr lang="en-US" sz="1100">
@@ -24671,7 +25165,7 @@
                   <a:schemeClr val="lt1"/>
                 </a:solidFill>
               </a:rPr>
-              <a:t>due to class imbalance.</a:t>
+              <a:t>Recall</a:t>
             </a:r>
             <a:endParaRPr sz="1100">
               <a:solidFill>
@@ -24679,11 +25173,104 @@
               </a:solidFill>
             </a:endParaRPr>
           </a:p>
+          <a:p>
+            <a:pPr indent="-298450" lvl="0" marL="457200" rtl="0" algn="l">
+              <a:lnSpc>
+                <a:spcPct val="115000"/>
+              </a:lnSpc>
+              <a:spcBef>
+                <a:spcPts val="0"/>
+              </a:spcBef>
+              <a:spcAft>
+                <a:spcPts val="0"/>
+              </a:spcAft>
+              <a:buClr>
+                <a:schemeClr val="lt1"/>
+              </a:buClr>
+              <a:buSzPts val="1100"/>
+              <a:buChar char="●"/>
+            </a:pPr>
+            <a:r>
+              <a:rPr lang="en-US" sz="1100">
+                <a:solidFill>
+                  <a:schemeClr val="lt1"/>
+                </a:solidFill>
+              </a:rPr>
+              <a:t>F1-score</a:t>
+            </a:r>
+            <a:endParaRPr sz="1100">
+              <a:solidFill>
+                <a:schemeClr val="lt1"/>
+              </a:solidFill>
+            </a:endParaRPr>
+          </a:p>
+          <a:p>
+            <a:pPr indent="-298450" lvl="0" marL="457200" rtl="0" algn="l">
+              <a:lnSpc>
+                <a:spcPct val="115000"/>
+              </a:lnSpc>
+              <a:spcBef>
+                <a:spcPts val="0"/>
+              </a:spcBef>
+              <a:spcAft>
+                <a:spcPts val="0"/>
+              </a:spcAft>
+              <a:buClr>
+                <a:schemeClr val="lt1"/>
+              </a:buClr>
+              <a:buSzPts val="1100"/>
+              <a:buChar char="●"/>
+            </a:pPr>
+            <a:r>
+              <a:rPr lang="en-US" sz="1100">
+                <a:solidFill>
+                  <a:schemeClr val="lt1"/>
+                </a:solidFill>
+              </a:rPr>
+              <a:t>ROC Curve</a:t>
+            </a:r>
+            <a:endParaRPr sz="1100">
+              <a:solidFill>
+                <a:schemeClr val="lt1"/>
+              </a:solidFill>
+            </a:endParaRPr>
+          </a:p>
+          <a:p>
+            <a:pPr indent="0" lvl="0" marL="0" marR="0" rtl="0" algn="l">
+              <a:lnSpc>
+                <a:spcPct val="100000"/>
+              </a:lnSpc>
+              <a:spcBef>
+                <a:spcPts val="1200"/>
+              </a:spcBef>
+              <a:spcAft>
+                <a:spcPts val="0"/>
+              </a:spcAft>
+              <a:buClr>
+                <a:srgbClr val="000000"/>
+              </a:buClr>
+              <a:buSzPts val="2000"/>
+              <a:buFont typeface="Arial"/>
+              <a:buNone/>
+            </a:pPr>
+            <a:r>
+              <a:t/>
+            </a:r>
+            <a:endParaRPr sz="2000">
+              <a:solidFill>
+                <a:schemeClr val="lt1"/>
+              </a:solidFill>
+              <a:latin typeface="Georgia"/>
+              <a:ea typeface="Georgia"/>
+              <a:cs typeface="Georgia"/>
+              <a:sym typeface="Georgia"/>
+            </a:endParaRPr>
+          </a:p>
         </p:txBody>
       </p:sp>
       <p:sp>
         <p:nvSpPr>
-          <p:cNvPr id="151" name="Google Shape;151;p20"/>
+          <p:cNvPr id="152" name="Google Shape;152;p20"/>
           <p:cNvSpPr txBox="1"/>
           <p:nvPr/>
         </p:nvSpPr>
@@ -24767,7 +25354,7 @@
     </p:bg>
     <p:spTree>
       <p:nvGrpSpPr>
-        <p:cNvPr id="155" name="Shape 155"/>
+        <p:cNvPr id="156" name="Shape 156"/>
         <p:cNvGrpSpPr/>
         <p:nvPr/>
       </p:nvGrpSpPr>
@@ -24781,7 +25368,7 @@
       </p:grpSpPr>
       <p:sp>
         <p:nvSpPr>
-          <p:cNvPr id="156" name="Google Shape;156;p21"/>
+          <p:cNvPr id="157" name="Google Shape;157;p21"/>
           <p:cNvSpPr/>
           <p:nvPr/>
         </p:nvSpPr>
@@ -24853,7 +25440,7 @@
       </p:sp>
       <p:sp>
         <p:nvSpPr>
-          <p:cNvPr id="157" name="Google Shape;157;p21"/>
+          <p:cNvPr id="158" name="Google Shape;158;p21"/>
           <p:cNvSpPr txBox="1"/>
           <p:nvPr/>
         </p:nvSpPr>
@@ -24919,7 +25506,7 @@
       </p:sp>
       <p:sp>
         <p:nvSpPr>
-          <p:cNvPr id="158" name="Google Shape;158;p21"/>
+          <p:cNvPr id="159" name="Google Shape;159;p21"/>
           <p:cNvSpPr/>
           <p:nvPr/>
         </p:nvSpPr>
@@ -24991,14 +25578,14 @@
       </p:sp>
       <p:sp>
         <p:nvSpPr>
-          <p:cNvPr id="159" name="Google Shape;159;p21"/>
+          <p:cNvPr id="160" name="Google Shape;160;p21"/>
           <p:cNvSpPr txBox="1"/>
           <p:nvPr/>
         </p:nvSpPr>
         <p:spPr>
           <a:xfrm>
-            <a:off x="822950" y="1799275"/>
-            <a:ext cx="10058400" cy="4530000"/>
+            <a:off x="822950" y="1973675"/>
+            <a:ext cx="10058400" cy="3953400"/>
           </a:xfrm>
           <a:prstGeom prst="rect">
             <a:avLst/>
@@ -25032,14 +25619,170 @@
               <a:buNone/>
             </a:pPr>
             <a:r>
-              <a:rPr lang="en-US" sz="1500">
+              <a:rPr b="1" lang="en-US" sz="1700">
                 <a:solidFill>
                   <a:schemeClr val="lt1"/>
                 </a:solidFill>
               </a:rPr>
-              <a:t>ROC Curve (Top Graph)</a:t>
+              <a:t>Validation Results</a:t>
             </a:r>
-            <a:endParaRPr sz="1500">
+            <a:endParaRPr b="1" sz="1700">
+              <a:solidFill>
+                <a:schemeClr val="lt1"/>
+              </a:solidFill>
+            </a:endParaRPr>
+          </a:p>
+          <a:p>
+            <a:pPr indent="-298450" lvl="0" marL="457200" rtl="0" algn="l">
+              <a:lnSpc>
+                <a:spcPct val="115000"/>
+              </a:lnSpc>
+              <a:spcBef>
+                <a:spcPts val="1200"/>
+              </a:spcBef>
+              <a:spcAft>
+                <a:spcPts val="0"/>
+              </a:spcAft>
+              <a:buClr>
+                <a:schemeClr val="lt1"/>
+              </a:buClr>
+              <a:buSzPts val="1100"/>
+              <a:buChar char="●"/>
+            </a:pPr>
+            <a:r>
+              <a:rPr lang="en-US" sz="1100">
+                <a:solidFill>
+                  <a:schemeClr val="lt1"/>
+                </a:solidFill>
+              </a:rPr>
+              <a:t>Accuracy: </a:t>
+            </a:r>
+            <a:r>
+              <a:rPr b="1" lang="en-US" sz="1100">
+                <a:solidFill>
+                  <a:schemeClr val="lt1"/>
+                </a:solidFill>
+              </a:rPr>
+              <a:t>82.82%</a:t>
+            </a:r>
+            <a:endParaRPr b="1" sz="1100">
+              <a:solidFill>
+                <a:schemeClr val="lt1"/>
+              </a:solidFill>
+            </a:endParaRPr>
+          </a:p>
+          <a:p>
+            <a:pPr indent="-298450" lvl="0" marL="457200" rtl="0" algn="l">
+              <a:lnSpc>
+                <a:spcPct val="115000"/>
+              </a:lnSpc>
+              <a:spcBef>
+                <a:spcPts val="0"/>
+              </a:spcBef>
+              <a:spcAft>
+                <a:spcPts val="0"/>
+              </a:spcAft>
+              <a:buClr>
+                <a:schemeClr val="lt1"/>
+              </a:buClr>
+              <a:buSzPts val="1100"/>
+              <a:buChar char="●"/>
+            </a:pPr>
+            <a:r>
+              <a:rPr lang="en-US" sz="1100">
+                <a:solidFill>
+                  <a:schemeClr val="lt1"/>
+                </a:solidFill>
+              </a:rPr>
+              <a:t>Precision: </a:t>
+            </a:r>
+            <a:r>
+              <a:rPr b="1" lang="en-US" sz="1100">
+                <a:solidFill>
+                  <a:schemeClr val="lt1"/>
+                </a:solidFill>
+              </a:rPr>
+              <a:t>0.00</a:t>
+            </a:r>
+            <a:endParaRPr b="1" sz="1100">
+              <a:solidFill>
+                <a:schemeClr val="lt1"/>
+              </a:solidFill>
+            </a:endParaRPr>
+          </a:p>
+          <a:p>
+            <a:pPr indent="-298450" lvl="0" marL="457200" rtl="0" algn="l">
+              <a:lnSpc>
+                <a:spcPct val="115000"/>
+              </a:lnSpc>
+              <a:spcBef>
+                <a:spcPts val="0"/>
+              </a:spcBef>
+              <a:spcAft>
+                <a:spcPts val="0"/>
+              </a:spcAft>
+              <a:buClr>
+                <a:schemeClr val="lt1"/>
+              </a:buClr>
+              <a:buSzPts val="1100"/>
+              <a:buChar char="●"/>
+            </a:pPr>
+            <a:r>
+              <a:rPr lang="en-US" sz="1100">
+                <a:solidFill>
+                  <a:schemeClr val="lt1"/>
+                </a:solidFill>
+              </a:rPr>
+              <a:t>Recall: </a:t>
+            </a:r>
+            <a:r>
+              <a:rPr b="1" lang="en-US" sz="1100">
+                <a:solidFill>
+                  <a:schemeClr val="lt1"/>
+                </a:solidFill>
+              </a:rPr>
+              <a:t>0.00</a:t>
+            </a:r>
+            <a:endParaRPr b="1" sz="1100">
+              <a:solidFill>
+                <a:schemeClr val="lt1"/>
+              </a:solidFill>
+            </a:endParaRPr>
+          </a:p>
+          <a:p>
+            <a:pPr indent="-298450" lvl="0" marL="457200" rtl="0" algn="l">
+              <a:lnSpc>
+                <a:spcPct val="115000"/>
+              </a:lnSpc>
+              <a:spcBef>
+                <a:spcPts val="0"/>
+              </a:spcBef>
+              <a:spcAft>
+                <a:spcPts val="0"/>
+              </a:spcAft>
+              <a:buClr>
+                <a:schemeClr val="lt1"/>
+              </a:buClr>
+              <a:buSzPts val="1100"/>
+              <a:buChar char="●"/>
+            </a:pPr>
+            <a:r>
+              <a:rPr lang="en-US" sz="1100">
+                <a:solidFill>
+                  <a:schemeClr val="lt1"/>
+                </a:solidFill>
+              </a:rPr>
+              <a:t>F1-score: </a:t>
+            </a:r>
+            <a:r>
+              <a:rPr b="1" lang="en-US" sz="1100">
+                <a:solidFill>
+                  <a:schemeClr val="lt1"/>
+                </a:solidFill>
+              </a:rPr>
+              <a:t>0.00</a:t>
+            </a:r>
+            <a:endParaRPr b="1" sz="1100">
               <a:solidFill>
                 <a:schemeClr val="lt1"/>
               </a:solidFill>
@@ -25051,7 +25794,7 @@
                 <a:spcPct val="115000"/>
               </a:lnSpc>
               <a:spcBef>
-                <a:spcPts val="900"/>
+                <a:spcPts val="1800"/>
               </a:spcBef>
               <a:spcAft>
                 <a:spcPts val="0"/>
@@ -25064,21 +25807,21 @@
               <a:buNone/>
             </a:pPr>
             <a:r>
-              <a:rPr lang="en-US" sz="1200">
+              <a:rPr b="1" lang="en-US" sz="1700">
                 <a:solidFill>
                   <a:schemeClr val="lt1"/>
                 </a:solidFill>
               </a:rPr>
-              <a:t>An ROC curve measures how well a model separates positive and negative classes.</a:t>
+              <a:t>Testing Results</a:t>
             </a:r>
-            <a:endParaRPr sz="1200">
+            <a:endParaRPr b="1" sz="1700">
               <a:solidFill>
                 <a:schemeClr val="lt1"/>
               </a:solidFill>
             </a:endParaRPr>
           </a:p>
           <a:p>
-            <a:pPr indent="-304800" lvl="0" marL="457200" rtl="0" algn="l">
+            <a:pPr indent="-298450" lvl="0" marL="457200" rtl="0" algn="l">
               <a:lnSpc>
                 <a:spcPct val="115000"/>
               </a:lnSpc>
@@ -25091,33 +25834,33 @@
               <a:buClr>
                 <a:schemeClr val="lt1"/>
               </a:buClr>
-              <a:buSzPts val="1200"/>
+              <a:buSzPts val="1100"/>
               <a:buChar char="●"/>
             </a:pPr>
             <a:r>
-              <a:rPr b="1" lang="en-US" sz="1200">
+              <a:rPr lang="en-US" sz="1100">
                 <a:solidFill>
                   <a:schemeClr val="lt1"/>
                 </a:solidFill>
               </a:rPr>
-              <a:t>AUC = 0.55</a:t>
+              <a:t>Accuracy: </a:t>
             </a:r>
             <a:r>
-              <a:rPr lang="en-US" sz="1200">
+              <a:rPr b="1" lang="en-US" sz="1100">
                 <a:solidFill>
                   <a:schemeClr val="lt1"/>
                 </a:solidFill>
               </a:rPr>
-              <a:t>: Shows almost zero predictive power.</a:t>
+              <a:t>82.62%</a:t>
             </a:r>
-            <a:endParaRPr sz="1200">
+            <a:endParaRPr b="1" sz="1100">
               <a:solidFill>
                 <a:schemeClr val="lt1"/>
               </a:solidFill>
             </a:endParaRPr>
           </a:p>
           <a:p>
-            <a:pPr indent="-304800" lvl="0" marL="457200" rtl="0" algn="l">
+            <a:pPr indent="-298450" lvl="0" marL="457200" rtl="0" algn="l">
               <a:lnSpc>
                 <a:spcPct val="115000"/>
               </a:lnSpc>
@@ -25130,104 +25873,18 @@
               <a:buClr>
                 <a:schemeClr val="lt1"/>
               </a:buClr>
-              <a:buSzPts val="1200"/>
+              <a:buSzPts val="1100"/>
               <a:buChar char="●"/>
             </a:pPr>
             <a:r>
-              <a:rPr b="1" lang="en-US" sz="1200">
+              <a:rPr lang="en-US" sz="1100">
                 <a:solidFill>
                   <a:schemeClr val="lt1"/>
                 </a:solidFill>
               </a:rPr>
-              <a:t>Baseline comparison</a:t>
+              <a:t>Similar failure pattern across datasets</a:t>
             </a:r>
-            <a:r>
-              <a:rPr lang="en-US" sz="1200">
-                <a:solidFill>
-                  <a:schemeClr val="lt1"/>
-                </a:solidFill>
-              </a:rPr>
-              <a:t>: Random guessing gives an AUC of 0.50.</a:t>
-            </a:r>
-            <a:endParaRPr sz="1200">
-              <a:solidFill>
-                <a:schemeClr val="lt1"/>
-              </a:solidFill>
-            </a:endParaRPr>
-          </a:p>
-          <a:p>
-            <a:pPr indent="-304800" lvl="0" marL="457200" rtl="0" algn="l">
-              <a:lnSpc>
-                <a:spcPct val="115000"/>
-              </a:lnSpc>
-              <a:spcBef>
-                <a:spcPts val="0"/>
-              </a:spcBef>
-              <a:spcAft>
-                <a:spcPts val="0"/>
-              </a:spcAft>
-              <a:buClr>
-                <a:schemeClr val="lt1"/>
-              </a:buClr>
-              <a:buSzPts val="1200"/>
-              <a:buChar char="●"/>
-            </a:pPr>
-            <a:r>
-              <a:rPr b="1" lang="en-US" sz="1200">
-                <a:solidFill>
-                  <a:schemeClr val="lt1"/>
-                </a:solidFill>
-              </a:rPr>
-              <a:t>Diagonal line</a:t>
-            </a:r>
-            <a:r>
-              <a:rPr lang="en-US" sz="1200">
-                <a:solidFill>
-                  <a:schemeClr val="lt1"/>
-                </a:solidFill>
-              </a:rPr>
-              <a:t>: Your curve closely hugs the random line.</a:t>
-            </a:r>
-            <a:endParaRPr sz="1200">
-              <a:solidFill>
-                <a:schemeClr val="lt1"/>
-              </a:solidFill>
-            </a:endParaRPr>
-          </a:p>
-          <a:p>
-            <a:pPr indent="-304800" lvl="0" marL="457200" rtl="0" algn="l">
-              <a:lnSpc>
-                <a:spcPct val="115000"/>
-              </a:lnSpc>
-              <a:spcBef>
-                <a:spcPts val="0"/>
-              </a:spcBef>
-              <a:spcAft>
-                <a:spcPts val="0"/>
-              </a:spcAft>
-              <a:buClr>
-                <a:schemeClr val="lt1"/>
-              </a:buClr>
-              <a:buSzPts val="1200"/>
-              <a:buChar char="●"/>
-            </a:pPr>
-            <a:r>
-              <a:rPr b="1" lang="en-US" sz="1200">
-                <a:solidFill>
-                  <a:schemeClr val="lt1"/>
-                </a:solidFill>
-              </a:rPr>
-              <a:t>Conclusion</a:t>
-            </a:r>
-            <a:r>
-              <a:rPr lang="en-US" sz="1200">
-                <a:solidFill>
-                  <a:schemeClr val="lt1"/>
-                </a:solidFill>
-              </a:rPr>
-              <a:t>: The model cannot reliably distinguish classes.</a:t>
-            </a:r>
-            <a:endParaRPr sz="1200">
+            <a:endParaRPr sz="1100">
               <a:solidFill>
                 <a:schemeClr val="lt1"/>
               </a:solidFill>
@@ -25239,7 +25896,7 @@
                 <a:spcPct val="115000"/>
               </a:lnSpc>
               <a:spcBef>
-                <a:spcPts val="2100"/>
+                <a:spcPts val="1800"/>
               </a:spcBef>
               <a:spcAft>
                 <a:spcPts val="0"/>
@@ -25252,9 +25909,14 @@
               <a:buNone/>
             </a:pPr>
             <a:r>
-              <a:t/>
+              <a:rPr b="1" lang="en-US" sz="1700">
+                <a:solidFill>
+                  <a:schemeClr val="lt1"/>
+                </a:solidFill>
+              </a:rPr>
+              <a:t>Key Insight</a:t>
             </a:r>
-            <a:endParaRPr sz="1200">
+            <a:endParaRPr b="1" sz="1700">
               <a:solidFill>
                 <a:schemeClr val="lt1"/>
               </a:solidFill>
@@ -25266,7 +25928,7 @@
                 <a:spcPct val="115000"/>
               </a:lnSpc>
               <a:spcBef>
-                <a:spcPts val="1800"/>
+                <a:spcPts val="1200"/>
               </a:spcBef>
               <a:spcAft>
                 <a:spcPts val="0"/>
@@ -25279,14 +25941,14 @@
               <a:buNone/>
             </a:pPr>
             <a:r>
-              <a:rPr lang="en-US" sz="1500">
+              <a:rPr lang="en-US" sz="1100">
                 <a:solidFill>
                   <a:schemeClr val="lt1"/>
                 </a:solidFill>
               </a:rPr>
-              <a:t>📉 Precision-Recall Curve (Bottom Graph)</a:t>
+              <a:t>Model predicted mostly:</a:t>
             </a:r>
-            <a:endParaRPr sz="1500">
+            <a:endParaRPr sz="1100">
               <a:solidFill>
                 <a:schemeClr val="lt1"/>
               </a:solidFill>
@@ -25298,7 +25960,7 @@
                 <a:spcPct val="115000"/>
               </a:lnSpc>
               <a:spcBef>
-                <a:spcPts val="900"/>
+                <a:spcPts val="1200"/>
               </a:spcBef>
               <a:spcAft>
                 <a:spcPts val="0"/>
@@ -25311,170 +25973,14 @@
               <a:buNone/>
             </a:pPr>
             <a:r>
-              <a:rPr lang="en-US" sz="1200">
+              <a:rPr lang="en-US" sz="1100">
                 <a:solidFill>
                   <a:schemeClr val="lt1"/>
                 </a:solidFill>
               </a:rPr>
-              <a:t>This curve evaluates performance when dealing with imbalanced datasets.</a:t>
+              <a:t>Not Happy</a:t>
             </a:r>
-            <a:endParaRPr sz="1200">
-              <a:solidFill>
-                <a:schemeClr val="lt1"/>
-              </a:solidFill>
-            </a:endParaRPr>
-          </a:p>
-          <a:p>
-            <a:pPr indent="-304800" lvl="0" marL="457200" rtl="0" algn="l">
-              <a:lnSpc>
-                <a:spcPct val="115000"/>
-              </a:lnSpc>
-              <a:spcBef>
-                <a:spcPts val="1200"/>
-              </a:spcBef>
-              <a:spcAft>
-                <a:spcPts val="0"/>
-              </a:spcAft>
-              <a:buClr>
-                <a:schemeClr val="lt1"/>
-              </a:buClr>
-              <a:buSzPts val="1200"/>
-              <a:buChar char="●"/>
-            </a:pPr>
-            <a:r>
-              <a:rPr b="1" lang="en-US" sz="1200">
-                <a:solidFill>
-                  <a:schemeClr val="lt1"/>
-                </a:solidFill>
-              </a:rPr>
-              <a:t>Flat line</a:t>
-            </a:r>
-            <a:r>
-              <a:rPr lang="en-US" sz="1200">
-                <a:solidFill>
-                  <a:schemeClr val="lt1"/>
-                </a:solidFill>
-              </a:rPr>
-              <a:t>: Precision stays constant near 0.20.</a:t>
-            </a:r>
-            <a:endParaRPr sz="1200">
-              <a:solidFill>
-                <a:schemeClr val="lt1"/>
-              </a:solidFill>
-            </a:endParaRPr>
-          </a:p>
-          <a:p>
-            <a:pPr indent="-304800" lvl="0" marL="457200" rtl="0" algn="l">
-              <a:lnSpc>
-                <a:spcPct val="115000"/>
-              </a:lnSpc>
-              <a:spcBef>
-                <a:spcPts val="0"/>
-              </a:spcBef>
-              <a:spcAft>
-                <a:spcPts val="0"/>
-              </a:spcAft>
-              <a:buClr>
-                <a:schemeClr val="lt1"/>
-              </a:buClr>
-              <a:buSzPts val="1200"/>
-              <a:buChar char="●"/>
-            </a:pPr>
-            <a:r>
-              <a:rPr b="1" lang="en-US" sz="1200">
-                <a:solidFill>
-                  <a:schemeClr val="lt1"/>
-                </a:solidFill>
-              </a:rPr>
-              <a:t>Class imbalance</a:t>
-            </a:r>
-            <a:r>
-              <a:rPr lang="en-US" sz="1200">
-                <a:solidFill>
-                  <a:schemeClr val="lt1"/>
-                </a:solidFill>
-              </a:rPr>
-              <a:t>: The positive class likely represents 20% of data.</a:t>
-            </a:r>
-            <a:endParaRPr sz="1200">
-              <a:solidFill>
-                <a:schemeClr val="lt1"/>
-              </a:solidFill>
-            </a:endParaRPr>
-          </a:p>
-          <a:p>
-            <a:pPr indent="-304800" lvl="0" marL="457200" rtl="0" algn="l">
-              <a:lnSpc>
-                <a:spcPct val="115000"/>
-              </a:lnSpc>
-              <a:spcBef>
-                <a:spcPts val="0"/>
-              </a:spcBef>
-              <a:spcAft>
-                <a:spcPts val="0"/>
-              </a:spcAft>
-              <a:buClr>
-                <a:schemeClr val="lt1"/>
-              </a:buClr>
-              <a:buSzPts val="1200"/>
-              <a:buChar char="●"/>
-            </a:pPr>
-            <a:r>
-              <a:rPr b="1" lang="en-US" sz="1200">
-                <a:solidFill>
-                  <a:schemeClr val="lt1"/>
-                </a:solidFill>
-              </a:rPr>
-              <a:t>High recall trap</a:t>
-            </a:r>
-            <a:r>
-              <a:rPr lang="en-US" sz="1200">
-                <a:solidFill>
-                  <a:schemeClr val="lt1"/>
-                </a:solidFill>
-              </a:rPr>
-              <a:t>: Increasing recall does not improve precision.</a:t>
-            </a:r>
-            <a:endParaRPr sz="1200">
-              <a:solidFill>
-                <a:schemeClr val="lt1"/>
-              </a:solidFill>
-            </a:endParaRPr>
-          </a:p>
-          <a:p>
-            <a:pPr indent="-304800" lvl="0" marL="457200" rtl="0" algn="l">
-              <a:lnSpc>
-                <a:spcPct val="115000"/>
-              </a:lnSpc>
-              <a:spcBef>
-                <a:spcPts val="0"/>
-              </a:spcBef>
-              <a:spcAft>
-                <a:spcPts val="0"/>
-              </a:spcAft>
-              <a:buClr>
-                <a:schemeClr val="lt1"/>
-              </a:buClr>
-              <a:buSzPts val="1200"/>
-              <a:buChar char="●"/>
-            </a:pPr>
-            <a:r>
-              <a:rPr b="1" lang="en-US" sz="1200">
-                <a:solidFill>
-                  <a:schemeClr val="lt1"/>
-                </a:solidFill>
-              </a:rPr>
-              <a:t>Conclusion</a:t>
-            </a:r>
-            <a:r>
-              <a:rPr lang="en-US" sz="1200">
-                <a:solidFill>
-                  <a:schemeClr val="lt1"/>
-                </a:solidFill>
-              </a:rPr>
-              <a:t>: The model behaves like a random classifier.</a:t>
-            </a:r>
-            <a:endParaRPr sz="1200">
+            <a:endParaRPr sz="1100">
               <a:solidFill>
                 <a:schemeClr val="lt1"/>
               </a:solidFill>
@@ -25486,7 +25992,7 @@
                 <a:spcPct val="115000"/>
               </a:lnSpc>
               <a:spcBef>
-                <a:spcPts val="2100"/>
+                <a:spcPts val="1200"/>
               </a:spcBef>
               <a:spcAft>
                 <a:spcPts val="1200"/>
@@ -25499,9 +26005,14 @@
               <a:buNone/>
             </a:pPr>
             <a:r>
-              <a:t/>
+              <a:rPr lang="en-US" sz="1100">
+                <a:solidFill>
+                  <a:schemeClr val="lt1"/>
+                </a:solidFill>
+              </a:rPr>
+              <a:t>due to class imbalance.</a:t>
             </a:r>
-            <a:endParaRPr b="1" sz="1700">
+            <a:endParaRPr sz="1100">
               <a:solidFill>
                 <a:schemeClr val="lt1"/>
               </a:solidFill>
@@ -25511,7 +26022,7 @@
       </p:sp>
       <p:sp>
         <p:nvSpPr>
-          <p:cNvPr id="160" name="Google Shape;160;p21"/>
+          <p:cNvPr id="161" name="Google Shape;161;p21"/>
           <p:cNvSpPr txBox="1"/>
           <p:nvPr/>
         </p:nvSpPr>
